--- a/Mapped Curriculum Lessons/Grade 7/Lesson 24 - Deleting by List Position/Deleting by List Position - Slides.pptx
+++ b/Mapped Curriculum Lessons/Grade 7/Lesson 24 - Deleting by List Position/Deleting by List Position - Slides.pptx
@@ -2,28 +2,28 @@
 <file path=ppt/presentation.xml><?xml version="1.0" encoding="utf-8"?>
 <p:presentation xmlns:p="http://schemas.openxmlformats.org/presentationml/2006/main" embedTrueTypeFonts="1" saveSubsetFonts="0">
   <p:sldMasterIdLst>
-    <p:sldMasterId xmlns:r="http://schemas.openxmlformats.org/officeDocument/2006/relationships" id="2147483648" r:id="R3ba7090843f04648"/>
+    <p:sldMasterId xmlns:r="http://schemas.openxmlformats.org/officeDocument/2006/relationships" id="2147483648" r:id="R913721a52fd44f6c"/>
   </p:sldMasterIdLst>
   <p:notesMasterIdLst>
-    <p:notesMasterId xmlns:r="http://schemas.openxmlformats.org/officeDocument/2006/relationships" r:id="Rf0b8d25e65ad4eba"/>
+    <p:notesMasterId xmlns:r="http://schemas.openxmlformats.org/officeDocument/2006/relationships" r:id="Rd9ceadfa415743b7"/>
   </p:notesMasterIdLst>
   <p:sldIdLst>
-    <p:sldId xmlns:r="http://schemas.openxmlformats.org/officeDocument/2006/relationships" id="256" r:id="Rbbd32ce17950492f"/>
-    <p:sldId xmlns:r="http://schemas.openxmlformats.org/officeDocument/2006/relationships" id="257" r:id="Rbb600a7cec2e441b"/>
-    <p:sldId xmlns:r="http://schemas.openxmlformats.org/officeDocument/2006/relationships" id="258" r:id="R5b2c8207e74e49dd"/>
-    <p:sldId xmlns:r="http://schemas.openxmlformats.org/officeDocument/2006/relationships" id="259" r:id="R70fa7205b332461f"/>
-    <p:sldId xmlns:r="http://schemas.openxmlformats.org/officeDocument/2006/relationships" id="260" r:id="Ra5a0c4e5d60343b9"/>
-    <p:sldId xmlns:r="http://schemas.openxmlformats.org/officeDocument/2006/relationships" id="261" r:id="R21fb8f053f4d47cf"/>
-    <p:sldId xmlns:r="http://schemas.openxmlformats.org/officeDocument/2006/relationships" id="262" r:id="Racf3dbc501f34a32"/>
-    <p:sldId xmlns:r="http://schemas.openxmlformats.org/officeDocument/2006/relationships" id="263" r:id="R0e8db8af04fa4918"/>
-    <p:sldId xmlns:r="http://schemas.openxmlformats.org/officeDocument/2006/relationships" id="264" r:id="Rc4792ba13d554666"/>
+    <p:sldId xmlns:r="http://schemas.openxmlformats.org/officeDocument/2006/relationships" id="256" r:id="Rac48b4dc71dc452e"/>
+    <p:sldId xmlns:r="http://schemas.openxmlformats.org/officeDocument/2006/relationships" id="257" r:id="Rabbafda655b3467c"/>
+    <p:sldId xmlns:r="http://schemas.openxmlformats.org/officeDocument/2006/relationships" id="258" r:id="R515e827f68fb4bbd"/>
+    <p:sldId xmlns:r="http://schemas.openxmlformats.org/officeDocument/2006/relationships" id="259" r:id="Re115f5fc44de4f73"/>
+    <p:sldId xmlns:r="http://schemas.openxmlformats.org/officeDocument/2006/relationships" id="260" r:id="R0c1b02848a3b4646"/>
+    <p:sldId xmlns:r="http://schemas.openxmlformats.org/officeDocument/2006/relationships" id="261" r:id="Rec7305b403cf4ccc"/>
+    <p:sldId xmlns:r="http://schemas.openxmlformats.org/officeDocument/2006/relationships" id="262" r:id="Rf3bf5d4e8bc44571"/>
+    <p:sldId xmlns:r="http://schemas.openxmlformats.org/officeDocument/2006/relationships" id="263" r:id="Rda3d7cf66d9c4051"/>
+    <p:sldId xmlns:r="http://schemas.openxmlformats.org/officeDocument/2006/relationships" id="264" r:id="Rc5943be4e5cc4cd6"/>
   </p:sldIdLst>
   <p:sldSz cx="12192000" cy="6858000"/>
   <p:notesSz cx="6858000" cy="9144000"/>
   <p:embeddedFontLst>
     <p:embeddedFont>
       <p:font typeface="JetBrains Mono"/>
-      <p:regular xmlns:r="http://schemas.openxmlformats.org/officeDocument/2006/relationships" r:id="Reeff11ff63474fed"/>
+      <p:regular xmlns:r="http://schemas.openxmlformats.org/officeDocument/2006/relationships" r:id="R29fbacd4ee9d4f9b"/>
     </p:embeddedFont>
   </p:embeddedFontLst>
 </p:presentation>
@@ -1071,7 +1071,7 @@
           <p:nvPr/>
         </p:nvPicPr>
         <p:blipFill rotWithShape="1">
-          <a:blip xmlns:r="http://schemas.openxmlformats.org/officeDocument/2006/relationships" xmlns:a="http://schemas.openxmlformats.org/drawingml/2006/main" r:embed="R85ddf51ed26a4945"/>
+          <a:blip xmlns:r="http://schemas.openxmlformats.org/officeDocument/2006/relationships" xmlns:a="http://schemas.openxmlformats.org/drawingml/2006/main" r:embed="Rb586be9e61124f6c"/>
           <a:stretch xmlns:a="http://schemas.openxmlformats.org/drawingml/2006/main"/>
         </p:blipFill>
         <p:spPr>
@@ -1451,7 +1451,7 @@
           <p:nvPr/>
         </p:nvPicPr>
         <p:blipFill rotWithShape="1">
-          <a:blip xmlns:r="http://schemas.openxmlformats.org/officeDocument/2006/relationships" xmlns:a="http://schemas.openxmlformats.org/drawingml/2006/main" r:embed="R52726f5ab13c46db">
+          <a:blip xmlns:r="http://schemas.openxmlformats.org/officeDocument/2006/relationships" xmlns:a="http://schemas.openxmlformats.org/drawingml/2006/main" r:embed="Rea6fb2dd547e4329">
             <a:alphaModFix amt="28000"/>
           </a:blip>
           <a:stretch xmlns:a="http://schemas.openxmlformats.org/drawingml/2006/main"/>
@@ -1664,7 +1664,7 @@
           <p:nvPr/>
         </p:nvPicPr>
         <p:blipFill rotWithShape="1">
-          <a:blip xmlns:r="http://schemas.openxmlformats.org/officeDocument/2006/relationships" xmlns:a="http://schemas.openxmlformats.org/drawingml/2006/main" r:embed="R756d2a59114748ee">
+          <a:blip xmlns:r="http://schemas.openxmlformats.org/officeDocument/2006/relationships" xmlns:a="http://schemas.openxmlformats.org/drawingml/2006/main" r:embed="Rbb0f09b25fb94ad3">
             <a:alphaModFix amt="28000"/>
           </a:blip>
           <a:stretch xmlns:a="http://schemas.openxmlformats.org/drawingml/2006/main"/>
@@ -1899,7 +1899,7 @@
           <p:nvPr/>
         </p:nvPicPr>
         <p:blipFill rotWithShape="1">
-          <a:blip xmlns:r="http://schemas.openxmlformats.org/officeDocument/2006/relationships" xmlns:a="http://schemas.openxmlformats.org/drawingml/2006/main" r:embed="R6a9a2969416c48ee">
+          <a:blip xmlns:r="http://schemas.openxmlformats.org/officeDocument/2006/relationships" xmlns:a="http://schemas.openxmlformats.org/drawingml/2006/main" r:embed="Rafc3056155d94172">
             <a:alphaModFix amt="28000"/>
           </a:blip>
           <a:stretch xmlns:a="http://schemas.openxmlformats.org/drawingml/2006/main"/>
@@ -2176,7 +2176,7 @@
           <p:nvPr/>
         </p:nvPicPr>
         <p:blipFill rotWithShape="1">
-          <a:blip xmlns:r="http://schemas.openxmlformats.org/officeDocument/2006/relationships" xmlns:a="http://schemas.openxmlformats.org/drawingml/2006/main" r:embed="Rd16592481bd2427c">
+          <a:blip xmlns:r="http://schemas.openxmlformats.org/officeDocument/2006/relationships" xmlns:a="http://schemas.openxmlformats.org/drawingml/2006/main" r:embed="R9c29f7ad5c5640c2">
             <a:alphaModFix amt="28000"/>
           </a:blip>
           <a:stretch xmlns:a="http://schemas.openxmlformats.org/drawingml/2006/main"/>
@@ -2451,7 +2451,7 @@
           <p:nvPr/>
         </p:nvPicPr>
         <p:blipFill rotWithShape="1">
-          <a:blip xmlns:r="http://schemas.openxmlformats.org/officeDocument/2006/relationships" xmlns:a="http://schemas.openxmlformats.org/drawingml/2006/main" r:embed="R09d4765850454b71">
+          <a:blip xmlns:r="http://schemas.openxmlformats.org/officeDocument/2006/relationships" xmlns:a="http://schemas.openxmlformats.org/drawingml/2006/main" r:embed="Rf11a3330056e43af">
             <a:alphaModFix amt="28000"/>
           </a:blip>
           <a:stretch xmlns:a="http://schemas.openxmlformats.org/drawingml/2006/main"/>
@@ -2875,7 +2875,7 @@
           <p:nvPr/>
         </p:nvPicPr>
         <p:blipFill rotWithShape="1">
-          <a:blip xmlns:r="http://schemas.openxmlformats.org/officeDocument/2006/relationships" xmlns:a="http://schemas.openxmlformats.org/drawingml/2006/main" r:embed="R16b41a72cf334ecb">
+          <a:blip xmlns:r="http://schemas.openxmlformats.org/officeDocument/2006/relationships" xmlns:a="http://schemas.openxmlformats.org/drawingml/2006/main" r:embed="Rc96ce90119de4036">
             <a:alphaModFix amt="28000"/>
           </a:blip>
           <a:stretch xmlns:a="http://schemas.openxmlformats.org/drawingml/2006/main"/>
@@ -3016,7 +3016,7 @@
           <p:nvPr/>
         </p:nvPicPr>
         <p:blipFill rotWithShape="1">
-          <a:blip xmlns:r="http://schemas.openxmlformats.org/officeDocument/2006/relationships" xmlns:a="http://schemas.openxmlformats.org/drawingml/2006/main" r:embed="Rb4299c2853d24008">
+          <a:blip xmlns:r="http://schemas.openxmlformats.org/officeDocument/2006/relationships" xmlns:a="http://schemas.openxmlformats.org/drawingml/2006/main" r:embed="R35ffc6be03084835">
             <a:alphaModFix amt="28000"/>
           </a:blip>
           <a:stretch xmlns:a="http://schemas.openxmlformats.org/drawingml/2006/main"/>
@@ -3130,7 +3130,7 @@
           <p:nvPr/>
         </p:nvPicPr>
         <p:blipFill rotWithShape="1">
-          <a:blip xmlns:r="http://schemas.openxmlformats.org/officeDocument/2006/relationships" xmlns:a="http://schemas.openxmlformats.org/drawingml/2006/main" r:embed="R471c0df7e2f84a53">
+          <a:blip xmlns:r="http://schemas.openxmlformats.org/officeDocument/2006/relationships" xmlns:a="http://schemas.openxmlformats.org/drawingml/2006/main" r:embed="Reb2f308f1cd34c96">
             <a:alphaModFix amt="28000"/>
           </a:blip>
           <a:stretch xmlns:a="http://schemas.openxmlformats.org/drawingml/2006/main"/>
@@ -3457,7 +3457,7 @@
           <p:nvPr/>
         </p:nvPicPr>
         <p:blipFill rotWithShape="1">
-          <a:blip xmlns:r="http://schemas.openxmlformats.org/officeDocument/2006/relationships" xmlns:a="http://schemas.openxmlformats.org/drawingml/2006/main" r:embed="Rf1e9c51019c04ddd">
+          <a:blip xmlns:r="http://schemas.openxmlformats.org/officeDocument/2006/relationships" xmlns:a="http://schemas.openxmlformats.org/drawingml/2006/main" r:embed="R4fb713afbd4648f5">
             <a:alphaModFix amt="28000"/>
           </a:blip>
           <a:stretch xmlns:a="http://schemas.openxmlformats.org/drawingml/2006/main"/>
@@ -3745,7 +3745,7 @@
           <p:nvPr/>
         </p:nvPicPr>
         <p:blipFill rotWithShape="1">
-          <a:blip xmlns:r="http://schemas.openxmlformats.org/officeDocument/2006/relationships" xmlns:a="http://schemas.openxmlformats.org/drawingml/2006/main" r:embed="R22745db663c644ac">
+          <a:blip xmlns:r="http://schemas.openxmlformats.org/officeDocument/2006/relationships" xmlns:a="http://schemas.openxmlformats.org/drawingml/2006/main" r:embed="Raa3dca2e553b4e3f">
             <a:alphaModFix amt="28000"/>
           </a:blip>
           <a:stretch xmlns:a="http://schemas.openxmlformats.org/drawingml/2006/main"/>
@@ -3982,17 +3982,17 @@
   </p:cSld>
   <p:clrMap bg1="lt1" tx1="dk1" bg2="lt2" tx2="dk2" accent1="accent1" accent2="accent2" accent3="accent3" accent4="accent4" accent5="accent5" accent6="accent6" hlink="hlink" folHlink="folHlink"/>
   <p:sldLayoutIdLst>
-    <p:sldLayoutId xmlns:r="http://schemas.openxmlformats.org/officeDocument/2006/relationships" id="2147483649" r:id="R4759d0c5fd114ca5"/>
-    <p:sldLayoutId xmlns:r="http://schemas.openxmlformats.org/officeDocument/2006/relationships" id="2147483650" r:id="R441338be10364231"/>
-    <p:sldLayoutId xmlns:r="http://schemas.openxmlformats.org/officeDocument/2006/relationships" id="2147483651" r:id="R734fa5c040104711"/>
-    <p:sldLayoutId xmlns:r="http://schemas.openxmlformats.org/officeDocument/2006/relationships" id="2147483652" r:id="Rf25909921bdb4d67"/>
-    <p:sldLayoutId xmlns:r="http://schemas.openxmlformats.org/officeDocument/2006/relationships" id="2147483653" r:id="Rf764bff2d8e34ef8"/>
-    <p:sldLayoutId xmlns:r="http://schemas.openxmlformats.org/officeDocument/2006/relationships" id="2147483654" r:id="R97d263611d384c7f"/>
-    <p:sldLayoutId xmlns:r="http://schemas.openxmlformats.org/officeDocument/2006/relationships" id="2147483655" r:id="R43967f2abfc14b6a"/>
-    <p:sldLayoutId xmlns:r="http://schemas.openxmlformats.org/officeDocument/2006/relationships" id="2147483656" r:id="R059c4f1eab30452b"/>
-    <p:sldLayoutId xmlns:r="http://schemas.openxmlformats.org/officeDocument/2006/relationships" id="2147483657" r:id="R01e0637c0e4a4ea0"/>
-    <p:sldLayoutId xmlns:r="http://schemas.openxmlformats.org/officeDocument/2006/relationships" id="2147483658" r:id="R05aac9141d6d49de"/>
-    <p:sldLayoutId xmlns:r="http://schemas.openxmlformats.org/officeDocument/2006/relationships" id="2147483659" r:id="R20cfc93e74294fd1"/>
+    <p:sldLayoutId xmlns:r="http://schemas.openxmlformats.org/officeDocument/2006/relationships" id="2147483649" r:id="Rc1ab48a38ee1461c"/>
+    <p:sldLayoutId xmlns:r="http://schemas.openxmlformats.org/officeDocument/2006/relationships" id="2147483650" r:id="R3504e23348d744d9"/>
+    <p:sldLayoutId xmlns:r="http://schemas.openxmlformats.org/officeDocument/2006/relationships" id="2147483651" r:id="Rd25b81c11ebf4744"/>
+    <p:sldLayoutId xmlns:r="http://schemas.openxmlformats.org/officeDocument/2006/relationships" id="2147483652" r:id="Rc06a2410fe82495b"/>
+    <p:sldLayoutId xmlns:r="http://schemas.openxmlformats.org/officeDocument/2006/relationships" id="2147483653" r:id="Rd66d5ceabb0d4457"/>
+    <p:sldLayoutId xmlns:r="http://schemas.openxmlformats.org/officeDocument/2006/relationships" id="2147483654" r:id="R017a72ddbb2b4b14"/>
+    <p:sldLayoutId xmlns:r="http://schemas.openxmlformats.org/officeDocument/2006/relationships" id="2147483655" r:id="R287073e71c444778"/>
+    <p:sldLayoutId xmlns:r="http://schemas.openxmlformats.org/officeDocument/2006/relationships" id="2147483656" r:id="R66e21610aae346a8"/>
+    <p:sldLayoutId xmlns:r="http://schemas.openxmlformats.org/officeDocument/2006/relationships" id="2147483657" r:id="Rc7b3b341ae5e4f2d"/>
+    <p:sldLayoutId xmlns:r="http://schemas.openxmlformats.org/officeDocument/2006/relationships" id="2147483658" r:id="R2bd71dc0fc8d43b5"/>
+    <p:sldLayoutId xmlns:r="http://schemas.openxmlformats.org/officeDocument/2006/relationships" id="2147483659" r:id="R668a441427cc4487"/>
   </p:sldLayoutIdLst>
   <p:hf hdr="0" ftr="0" dt="0"/>
   <p:txStyles>

--- a/Mapped Curriculum Lessons/Grade 7/Lesson 24 - Deleting by List Position/Deleting by List Position - Slides.pptx
+++ b/Mapped Curriculum Lessons/Grade 7/Lesson 24 - Deleting by List Position/Deleting by List Position - Slides.pptx
@@ -2,28 +2,28 @@
 <file path=ppt/presentation.xml><?xml version="1.0" encoding="utf-8"?>
 <p:presentation xmlns:p="http://schemas.openxmlformats.org/presentationml/2006/main" embedTrueTypeFonts="1" saveSubsetFonts="0">
   <p:sldMasterIdLst>
-    <p:sldMasterId xmlns:r="http://schemas.openxmlformats.org/officeDocument/2006/relationships" id="2147483648" r:id="R913721a52fd44f6c"/>
+    <p:sldMasterId xmlns:r="http://schemas.openxmlformats.org/officeDocument/2006/relationships" id="2147483648" r:id="R4cd098b545274bf5"/>
   </p:sldMasterIdLst>
   <p:notesMasterIdLst>
-    <p:notesMasterId xmlns:r="http://schemas.openxmlformats.org/officeDocument/2006/relationships" r:id="Rd9ceadfa415743b7"/>
+    <p:notesMasterId xmlns:r="http://schemas.openxmlformats.org/officeDocument/2006/relationships" r:id="R8d2d3b1fee4a4d3c"/>
   </p:notesMasterIdLst>
   <p:sldIdLst>
-    <p:sldId xmlns:r="http://schemas.openxmlformats.org/officeDocument/2006/relationships" id="256" r:id="Rac48b4dc71dc452e"/>
-    <p:sldId xmlns:r="http://schemas.openxmlformats.org/officeDocument/2006/relationships" id="257" r:id="Rabbafda655b3467c"/>
-    <p:sldId xmlns:r="http://schemas.openxmlformats.org/officeDocument/2006/relationships" id="258" r:id="R515e827f68fb4bbd"/>
-    <p:sldId xmlns:r="http://schemas.openxmlformats.org/officeDocument/2006/relationships" id="259" r:id="Re115f5fc44de4f73"/>
-    <p:sldId xmlns:r="http://schemas.openxmlformats.org/officeDocument/2006/relationships" id="260" r:id="R0c1b02848a3b4646"/>
-    <p:sldId xmlns:r="http://schemas.openxmlformats.org/officeDocument/2006/relationships" id="261" r:id="Rec7305b403cf4ccc"/>
-    <p:sldId xmlns:r="http://schemas.openxmlformats.org/officeDocument/2006/relationships" id="262" r:id="Rf3bf5d4e8bc44571"/>
-    <p:sldId xmlns:r="http://schemas.openxmlformats.org/officeDocument/2006/relationships" id="263" r:id="Rda3d7cf66d9c4051"/>
-    <p:sldId xmlns:r="http://schemas.openxmlformats.org/officeDocument/2006/relationships" id="264" r:id="Rc5943be4e5cc4cd6"/>
+    <p:sldId xmlns:r="http://schemas.openxmlformats.org/officeDocument/2006/relationships" id="256" r:id="Rff49bde0f09f4d2f"/>
+    <p:sldId xmlns:r="http://schemas.openxmlformats.org/officeDocument/2006/relationships" id="257" r:id="R9516c69fadb442a6"/>
+    <p:sldId xmlns:r="http://schemas.openxmlformats.org/officeDocument/2006/relationships" id="258" r:id="R2b05cc419595460b"/>
+    <p:sldId xmlns:r="http://schemas.openxmlformats.org/officeDocument/2006/relationships" id="259" r:id="R28df51ad342b4703"/>
+    <p:sldId xmlns:r="http://schemas.openxmlformats.org/officeDocument/2006/relationships" id="260" r:id="R70764ec945e94e85"/>
+    <p:sldId xmlns:r="http://schemas.openxmlformats.org/officeDocument/2006/relationships" id="261" r:id="Rb1a5efa24c4d4c20"/>
+    <p:sldId xmlns:r="http://schemas.openxmlformats.org/officeDocument/2006/relationships" id="262" r:id="Rc0e682c36c534462"/>
+    <p:sldId xmlns:r="http://schemas.openxmlformats.org/officeDocument/2006/relationships" id="263" r:id="Rb262e7733a3247c1"/>
+    <p:sldId xmlns:r="http://schemas.openxmlformats.org/officeDocument/2006/relationships" id="264" r:id="Rddd392932e674c2d"/>
   </p:sldIdLst>
   <p:sldSz cx="12192000" cy="6858000"/>
   <p:notesSz cx="6858000" cy="9144000"/>
   <p:embeddedFontLst>
     <p:embeddedFont>
       <p:font typeface="JetBrains Mono"/>
-      <p:regular xmlns:r="http://schemas.openxmlformats.org/officeDocument/2006/relationships" r:id="R29fbacd4ee9d4f9b"/>
+      <p:regular xmlns:r="http://schemas.openxmlformats.org/officeDocument/2006/relationships" r:id="R909a0e8ec68e4f2f"/>
     </p:embeddedFont>
   </p:embeddedFontLst>
 </p:presentation>
@@ -1071,7 +1071,7 @@
           <p:nvPr/>
         </p:nvPicPr>
         <p:blipFill rotWithShape="1">
-          <a:blip xmlns:r="http://schemas.openxmlformats.org/officeDocument/2006/relationships" xmlns:a="http://schemas.openxmlformats.org/drawingml/2006/main" r:embed="Rb586be9e61124f6c"/>
+          <a:blip xmlns:r="http://schemas.openxmlformats.org/officeDocument/2006/relationships" xmlns:a="http://schemas.openxmlformats.org/drawingml/2006/main" r:embed="R91b87af7539745f0"/>
           <a:stretch xmlns:a="http://schemas.openxmlformats.org/drawingml/2006/main"/>
         </p:blipFill>
         <p:spPr>
@@ -1451,7 +1451,7 @@
           <p:nvPr/>
         </p:nvPicPr>
         <p:blipFill rotWithShape="1">
-          <a:blip xmlns:r="http://schemas.openxmlformats.org/officeDocument/2006/relationships" xmlns:a="http://schemas.openxmlformats.org/drawingml/2006/main" r:embed="Rea6fb2dd547e4329">
+          <a:blip xmlns:r="http://schemas.openxmlformats.org/officeDocument/2006/relationships" xmlns:a="http://schemas.openxmlformats.org/drawingml/2006/main" r:embed="R8f791418c5eb42a2">
             <a:alphaModFix amt="28000"/>
           </a:blip>
           <a:stretch xmlns:a="http://schemas.openxmlformats.org/drawingml/2006/main"/>
@@ -1664,7 +1664,7 @@
           <p:nvPr/>
         </p:nvPicPr>
         <p:blipFill rotWithShape="1">
-          <a:blip xmlns:r="http://schemas.openxmlformats.org/officeDocument/2006/relationships" xmlns:a="http://schemas.openxmlformats.org/drawingml/2006/main" r:embed="Rbb0f09b25fb94ad3">
+          <a:blip xmlns:r="http://schemas.openxmlformats.org/officeDocument/2006/relationships" xmlns:a="http://schemas.openxmlformats.org/drawingml/2006/main" r:embed="Ra6aa313bf1fe4297">
             <a:alphaModFix amt="28000"/>
           </a:blip>
           <a:stretch xmlns:a="http://schemas.openxmlformats.org/drawingml/2006/main"/>
@@ -1899,7 +1899,7 @@
           <p:nvPr/>
         </p:nvPicPr>
         <p:blipFill rotWithShape="1">
-          <a:blip xmlns:r="http://schemas.openxmlformats.org/officeDocument/2006/relationships" xmlns:a="http://schemas.openxmlformats.org/drawingml/2006/main" r:embed="Rafc3056155d94172">
+          <a:blip xmlns:r="http://schemas.openxmlformats.org/officeDocument/2006/relationships" xmlns:a="http://schemas.openxmlformats.org/drawingml/2006/main" r:embed="R67f0340ec39946aa">
             <a:alphaModFix amt="28000"/>
           </a:blip>
           <a:stretch xmlns:a="http://schemas.openxmlformats.org/drawingml/2006/main"/>
@@ -2176,7 +2176,7 @@
           <p:nvPr/>
         </p:nvPicPr>
         <p:blipFill rotWithShape="1">
-          <a:blip xmlns:r="http://schemas.openxmlformats.org/officeDocument/2006/relationships" xmlns:a="http://schemas.openxmlformats.org/drawingml/2006/main" r:embed="R9c29f7ad5c5640c2">
+          <a:blip xmlns:r="http://schemas.openxmlformats.org/officeDocument/2006/relationships" xmlns:a="http://schemas.openxmlformats.org/drawingml/2006/main" r:embed="R98307a77c17f452f">
             <a:alphaModFix amt="28000"/>
           </a:blip>
           <a:stretch xmlns:a="http://schemas.openxmlformats.org/drawingml/2006/main"/>
@@ -2451,7 +2451,7 @@
           <p:nvPr/>
         </p:nvPicPr>
         <p:blipFill rotWithShape="1">
-          <a:blip xmlns:r="http://schemas.openxmlformats.org/officeDocument/2006/relationships" xmlns:a="http://schemas.openxmlformats.org/drawingml/2006/main" r:embed="Rf11a3330056e43af">
+          <a:blip xmlns:r="http://schemas.openxmlformats.org/officeDocument/2006/relationships" xmlns:a="http://schemas.openxmlformats.org/drawingml/2006/main" r:embed="R0adeba99ff254bb3">
             <a:alphaModFix amt="28000"/>
           </a:blip>
           <a:stretch xmlns:a="http://schemas.openxmlformats.org/drawingml/2006/main"/>
@@ -2875,7 +2875,7 @@
           <p:nvPr/>
         </p:nvPicPr>
         <p:blipFill rotWithShape="1">
-          <a:blip xmlns:r="http://schemas.openxmlformats.org/officeDocument/2006/relationships" xmlns:a="http://schemas.openxmlformats.org/drawingml/2006/main" r:embed="Rc96ce90119de4036">
+          <a:blip xmlns:r="http://schemas.openxmlformats.org/officeDocument/2006/relationships" xmlns:a="http://schemas.openxmlformats.org/drawingml/2006/main" r:embed="R153bb21a05e045a8">
             <a:alphaModFix amt="28000"/>
           </a:blip>
           <a:stretch xmlns:a="http://schemas.openxmlformats.org/drawingml/2006/main"/>
@@ -3016,7 +3016,7 @@
           <p:nvPr/>
         </p:nvPicPr>
         <p:blipFill rotWithShape="1">
-          <a:blip xmlns:r="http://schemas.openxmlformats.org/officeDocument/2006/relationships" xmlns:a="http://schemas.openxmlformats.org/drawingml/2006/main" r:embed="R35ffc6be03084835">
+          <a:blip xmlns:r="http://schemas.openxmlformats.org/officeDocument/2006/relationships" xmlns:a="http://schemas.openxmlformats.org/drawingml/2006/main" r:embed="R25529b4875134119">
             <a:alphaModFix amt="28000"/>
           </a:blip>
           <a:stretch xmlns:a="http://schemas.openxmlformats.org/drawingml/2006/main"/>
@@ -3130,7 +3130,7 @@
           <p:nvPr/>
         </p:nvPicPr>
         <p:blipFill rotWithShape="1">
-          <a:blip xmlns:r="http://schemas.openxmlformats.org/officeDocument/2006/relationships" xmlns:a="http://schemas.openxmlformats.org/drawingml/2006/main" r:embed="Reb2f308f1cd34c96">
+          <a:blip xmlns:r="http://schemas.openxmlformats.org/officeDocument/2006/relationships" xmlns:a="http://schemas.openxmlformats.org/drawingml/2006/main" r:embed="R442d40499e9c4a9f">
             <a:alphaModFix amt="28000"/>
           </a:blip>
           <a:stretch xmlns:a="http://schemas.openxmlformats.org/drawingml/2006/main"/>
@@ -3457,7 +3457,7 @@
           <p:nvPr/>
         </p:nvPicPr>
         <p:blipFill rotWithShape="1">
-          <a:blip xmlns:r="http://schemas.openxmlformats.org/officeDocument/2006/relationships" xmlns:a="http://schemas.openxmlformats.org/drawingml/2006/main" r:embed="R4fb713afbd4648f5">
+          <a:blip xmlns:r="http://schemas.openxmlformats.org/officeDocument/2006/relationships" xmlns:a="http://schemas.openxmlformats.org/drawingml/2006/main" r:embed="Rf6827a228e944f47">
             <a:alphaModFix amt="28000"/>
           </a:blip>
           <a:stretch xmlns:a="http://schemas.openxmlformats.org/drawingml/2006/main"/>
@@ -3745,7 +3745,7 @@
           <p:nvPr/>
         </p:nvPicPr>
         <p:blipFill rotWithShape="1">
-          <a:blip xmlns:r="http://schemas.openxmlformats.org/officeDocument/2006/relationships" xmlns:a="http://schemas.openxmlformats.org/drawingml/2006/main" r:embed="Raa3dca2e553b4e3f">
+          <a:blip xmlns:r="http://schemas.openxmlformats.org/officeDocument/2006/relationships" xmlns:a="http://schemas.openxmlformats.org/drawingml/2006/main" r:embed="R8c3ea0b7fae44fde">
             <a:alphaModFix amt="28000"/>
           </a:blip>
           <a:stretch xmlns:a="http://schemas.openxmlformats.org/drawingml/2006/main"/>
@@ -3982,17 +3982,17 @@
   </p:cSld>
   <p:clrMap bg1="lt1" tx1="dk1" bg2="lt2" tx2="dk2" accent1="accent1" accent2="accent2" accent3="accent3" accent4="accent4" accent5="accent5" accent6="accent6" hlink="hlink" folHlink="folHlink"/>
   <p:sldLayoutIdLst>
-    <p:sldLayoutId xmlns:r="http://schemas.openxmlformats.org/officeDocument/2006/relationships" id="2147483649" r:id="Rc1ab48a38ee1461c"/>
-    <p:sldLayoutId xmlns:r="http://schemas.openxmlformats.org/officeDocument/2006/relationships" id="2147483650" r:id="R3504e23348d744d9"/>
-    <p:sldLayoutId xmlns:r="http://schemas.openxmlformats.org/officeDocument/2006/relationships" id="2147483651" r:id="Rd25b81c11ebf4744"/>
-    <p:sldLayoutId xmlns:r="http://schemas.openxmlformats.org/officeDocument/2006/relationships" id="2147483652" r:id="Rc06a2410fe82495b"/>
-    <p:sldLayoutId xmlns:r="http://schemas.openxmlformats.org/officeDocument/2006/relationships" id="2147483653" r:id="Rd66d5ceabb0d4457"/>
-    <p:sldLayoutId xmlns:r="http://schemas.openxmlformats.org/officeDocument/2006/relationships" id="2147483654" r:id="R017a72ddbb2b4b14"/>
-    <p:sldLayoutId xmlns:r="http://schemas.openxmlformats.org/officeDocument/2006/relationships" id="2147483655" r:id="R287073e71c444778"/>
-    <p:sldLayoutId xmlns:r="http://schemas.openxmlformats.org/officeDocument/2006/relationships" id="2147483656" r:id="R66e21610aae346a8"/>
-    <p:sldLayoutId xmlns:r="http://schemas.openxmlformats.org/officeDocument/2006/relationships" id="2147483657" r:id="Rc7b3b341ae5e4f2d"/>
-    <p:sldLayoutId xmlns:r="http://schemas.openxmlformats.org/officeDocument/2006/relationships" id="2147483658" r:id="R2bd71dc0fc8d43b5"/>
-    <p:sldLayoutId xmlns:r="http://schemas.openxmlformats.org/officeDocument/2006/relationships" id="2147483659" r:id="R668a441427cc4487"/>
+    <p:sldLayoutId xmlns:r="http://schemas.openxmlformats.org/officeDocument/2006/relationships" id="2147483649" r:id="Re4cb6e0281c146f3"/>
+    <p:sldLayoutId xmlns:r="http://schemas.openxmlformats.org/officeDocument/2006/relationships" id="2147483650" r:id="R7d442cb2f93d4f44"/>
+    <p:sldLayoutId xmlns:r="http://schemas.openxmlformats.org/officeDocument/2006/relationships" id="2147483651" r:id="R480be907c2384ac6"/>
+    <p:sldLayoutId xmlns:r="http://schemas.openxmlformats.org/officeDocument/2006/relationships" id="2147483652" r:id="Rd2771701767f4583"/>
+    <p:sldLayoutId xmlns:r="http://schemas.openxmlformats.org/officeDocument/2006/relationships" id="2147483653" r:id="R29c5d0e31eb54e7a"/>
+    <p:sldLayoutId xmlns:r="http://schemas.openxmlformats.org/officeDocument/2006/relationships" id="2147483654" r:id="Rcb0e07aa104c4f25"/>
+    <p:sldLayoutId xmlns:r="http://schemas.openxmlformats.org/officeDocument/2006/relationships" id="2147483655" r:id="R4bf8c6ddb6974db0"/>
+    <p:sldLayoutId xmlns:r="http://schemas.openxmlformats.org/officeDocument/2006/relationships" id="2147483656" r:id="R1e66304d1c05425f"/>
+    <p:sldLayoutId xmlns:r="http://schemas.openxmlformats.org/officeDocument/2006/relationships" id="2147483657" r:id="Rc407163458a74a97"/>
+    <p:sldLayoutId xmlns:r="http://schemas.openxmlformats.org/officeDocument/2006/relationships" id="2147483658" r:id="Re92b5bba30d94605"/>
+    <p:sldLayoutId xmlns:r="http://schemas.openxmlformats.org/officeDocument/2006/relationships" id="2147483659" r:id="R8ca89803f0c64599"/>
   </p:sldLayoutIdLst>
   <p:hf hdr="0" ftr="0" dt="0"/>
   <p:txStyles>
@@ -8908,7 +8908,7 @@
         </p:spPr>
         <p:txBody>
           <a:bodyPr xmlns:a="http://schemas.openxmlformats.org/drawingml/2006/main">
-            <a:normAutofit fontScale="100000"/>
+            <a:normAutofit fontScale="85495"/>
           </a:bodyPr>
           <a:lstStyle xmlns:a="http://schemas.openxmlformats.org/drawingml/2006/main"/>
           <a:p xmlns:a="http://schemas.openxmlformats.org/drawingml/2006/main">
@@ -8927,7 +8927,205 @@
                 <a:ea typeface="Calibri"/>
                 <a:cs typeface="Calibri"/>
               </a:rPr>
-              <a:t>Build a queue editor with four names. Ask for one valid cancellation position, store and delete that name, then traverse the remaining queue with numbered positions using a counter.</a:t>
+              <a:t>Store </a:t>
+            </a:r>
+            <a:r>
+              <a:rPr sz="2400" b="0">
+                <a:solidFill>
+                  <a:srgbClr val="067D17"/>
+                </a:solidFill>
+                <a:latin typeface="JetBrains Mono"/>
+                <a:ea typeface="JetBrains Mono"/>
+                <a:cs typeface="JetBrains Mono"/>
+              </a:rPr>
+              <a:t>"Ari"</a:t>
+            </a:r>
+            <a:r>
+              <a:rPr sz="2400" b="0">
+                <a:solidFill>
+                  <a:srgbClr val="080808"/>
+                </a:solidFill>
+                <a:latin typeface="Calibri"/>
+                <a:ea typeface="Calibri"/>
+                <a:cs typeface="Calibri"/>
+              </a:rPr>
+              <a:t>, </a:t>
+            </a:r>
+            <a:r>
+              <a:rPr sz="2400" b="0">
+                <a:solidFill>
+                  <a:srgbClr val="067D17"/>
+                </a:solidFill>
+                <a:latin typeface="JetBrains Mono"/>
+                <a:ea typeface="JetBrains Mono"/>
+                <a:cs typeface="JetBrains Mono"/>
+              </a:rPr>
+              <a:t>"Bao"</a:t>
+            </a:r>
+            <a:r>
+              <a:rPr sz="2400" b="0">
+                <a:solidFill>
+                  <a:srgbClr val="080808"/>
+                </a:solidFill>
+                <a:latin typeface="Calibri"/>
+                <a:ea typeface="Calibri"/>
+                <a:cs typeface="Calibri"/>
+              </a:rPr>
+              <a:t>, </a:t>
+            </a:r>
+            <a:r>
+              <a:rPr sz="2400" b="0">
+                <a:solidFill>
+                  <a:srgbClr val="067D17"/>
+                </a:solidFill>
+                <a:latin typeface="JetBrains Mono"/>
+                <a:ea typeface="JetBrains Mono"/>
+                <a:cs typeface="JetBrains Mono"/>
+              </a:rPr>
+              <a:t>"Cleo"</a:t>
+            </a:r>
+            <a:r>
+              <a:rPr sz="2400" b="0">
+                <a:solidFill>
+                  <a:srgbClr val="080808"/>
+                </a:solidFill>
+                <a:latin typeface="Calibri"/>
+                <a:ea typeface="Calibri"/>
+                <a:cs typeface="Calibri"/>
+              </a:rPr>
+              <a:t> and </a:t>
+            </a:r>
+            <a:r>
+              <a:rPr sz="2400" b="0">
+                <a:solidFill>
+                  <a:srgbClr val="067D17"/>
+                </a:solidFill>
+                <a:latin typeface="JetBrains Mono"/>
+                <a:ea typeface="JetBrains Mono"/>
+                <a:cs typeface="JetBrains Mono"/>
+              </a:rPr>
+              <a:t>"Dara"</a:t>
+            </a:r>
+            <a:r>
+              <a:rPr sz="2400" b="0">
+                <a:solidFill>
+                  <a:srgbClr val="080808"/>
+                </a:solidFill>
+                <a:latin typeface="Calibri"/>
+                <a:ea typeface="Calibri"/>
+                <a:cs typeface="Calibri"/>
+              </a:rPr>
+              <a:t> in [queue]. Ask for a cancellation position from 0 to 3 and store it in [position]. Store the selected name in [cancelled], delete it from [queue], and display </a:t>
+            </a:r>
+            <a:r>
+              <a:rPr sz="2400" b="0">
+                <a:solidFill>
+                  <a:srgbClr val="067D17"/>
+                </a:solidFill>
+                <a:latin typeface="JetBrains Mono"/>
+                <a:ea typeface="JetBrains Mono"/>
+                <a:cs typeface="JetBrains Mono"/>
+              </a:rPr>
+              <a:t>"Cancelled:"</a:t>
+            </a:r>
+            <a:r>
+              <a:rPr sz="2400" b="0">
+                <a:solidFill>
+                  <a:srgbClr val="080808"/>
+                </a:solidFill>
+                <a:latin typeface="Calibri"/>
+                <a:ea typeface="Calibri"/>
+                <a:cs typeface="Calibri"/>
+              </a:rPr>
+              <a:t> followed by [cancelled]. Use a </a:t>
+            </a:r>
+            <a:r>
+              <a:rPr sz="2400" b="0">
+                <a:solidFill>
+                  <a:srgbClr val="1750EB"/>
+                </a:solidFill>
+                <a:latin typeface="JetBrains Mono"/>
+                <a:ea typeface="JetBrains Mono"/>
+                <a:cs typeface="JetBrains Mono"/>
+              </a:rPr>
+              <a:t>for</a:t>
+            </a:r>
+            <a:r>
+              <a:rPr sz="2400" b="0">
+                <a:solidFill>
+                  <a:srgbClr val="080808"/>
+                </a:solidFill>
+                <a:latin typeface="Calibri"/>
+                <a:ea typeface="Calibri"/>
+                <a:cs typeface="Calibri"/>
+              </a:rPr>
+              <a:t> loop and a counter called [number] to display the position and name of each remaining person. Test position 1; the remaining lines must be </a:t>
+            </a:r>
+            <a:r>
+              <a:rPr sz="2400" b="0">
+                <a:solidFill>
+                  <a:srgbClr val="067D17"/>
+                </a:solidFill>
+                <a:latin typeface="JetBrains Mono"/>
+                <a:ea typeface="JetBrains Mono"/>
+                <a:cs typeface="JetBrains Mono"/>
+              </a:rPr>
+              <a:t>"0 Ari"</a:t>
+            </a:r>
+            <a:r>
+              <a:rPr sz="2400" b="0">
+                <a:solidFill>
+                  <a:srgbClr val="080808"/>
+                </a:solidFill>
+                <a:latin typeface="Calibri"/>
+                <a:ea typeface="Calibri"/>
+                <a:cs typeface="Calibri"/>
+              </a:rPr>
+              <a:t>, </a:t>
+            </a:r>
+            <a:r>
+              <a:rPr sz="2400" b="0">
+                <a:solidFill>
+                  <a:srgbClr val="067D17"/>
+                </a:solidFill>
+                <a:latin typeface="JetBrains Mono"/>
+                <a:ea typeface="JetBrains Mono"/>
+                <a:cs typeface="JetBrains Mono"/>
+              </a:rPr>
+              <a:t>"1 Cleo"</a:t>
+            </a:r>
+            <a:r>
+              <a:rPr sz="2400" b="0">
+                <a:solidFill>
+                  <a:srgbClr val="080808"/>
+                </a:solidFill>
+                <a:latin typeface="Calibri"/>
+                <a:ea typeface="Calibri"/>
+                <a:cs typeface="Calibri"/>
+              </a:rPr>
+              <a:t> and </a:t>
+            </a:r>
+            <a:r>
+              <a:rPr sz="2400" b="0">
+                <a:solidFill>
+                  <a:srgbClr val="067D17"/>
+                </a:solidFill>
+                <a:latin typeface="JetBrains Mono"/>
+                <a:ea typeface="JetBrains Mono"/>
+                <a:cs typeface="JetBrains Mono"/>
+              </a:rPr>
+              <a:t>"2 Dara"</a:t>
+            </a:r>
+            <a:r>
+              <a:rPr sz="2400" b="0">
+                <a:solidFill>
+                  <a:srgbClr val="080808"/>
+                </a:solidFill>
+                <a:latin typeface="Calibri"/>
+                <a:ea typeface="Calibri"/>
+                <a:cs typeface="Calibri"/>
+              </a:rPr>
+              <a:t>.</a:t>
             </a:r>
           </a:p>
         </p:txBody>

--- a/Mapped Curriculum Lessons/Grade 7/Lesson 24 - Deleting by List Position/Deleting by List Position - Slides.pptx
+++ b/Mapped Curriculum Lessons/Grade 7/Lesson 24 - Deleting by List Position/Deleting by List Position - Slides.pptx
@@ -2,28 +2,28 @@
 <file path=ppt/presentation.xml><?xml version="1.0" encoding="utf-8"?>
 <p:presentation xmlns:p="http://schemas.openxmlformats.org/presentationml/2006/main" embedTrueTypeFonts="1" saveSubsetFonts="0">
   <p:sldMasterIdLst>
-    <p:sldMasterId xmlns:r="http://schemas.openxmlformats.org/officeDocument/2006/relationships" id="2147483648" r:id="R4cd098b545274bf5"/>
+    <p:sldMasterId xmlns:r="http://schemas.openxmlformats.org/officeDocument/2006/relationships" id="2147483648" r:id="R62dbcfc7fa6b4a5f"/>
   </p:sldMasterIdLst>
   <p:notesMasterIdLst>
-    <p:notesMasterId xmlns:r="http://schemas.openxmlformats.org/officeDocument/2006/relationships" r:id="R8d2d3b1fee4a4d3c"/>
+    <p:notesMasterId xmlns:r="http://schemas.openxmlformats.org/officeDocument/2006/relationships" r:id="R362fbf9f2897436f"/>
   </p:notesMasterIdLst>
   <p:sldIdLst>
-    <p:sldId xmlns:r="http://schemas.openxmlformats.org/officeDocument/2006/relationships" id="256" r:id="Rff49bde0f09f4d2f"/>
-    <p:sldId xmlns:r="http://schemas.openxmlformats.org/officeDocument/2006/relationships" id="257" r:id="R9516c69fadb442a6"/>
-    <p:sldId xmlns:r="http://schemas.openxmlformats.org/officeDocument/2006/relationships" id="258" r:id="R2b05cc419595460b"/>
-    <p:sldId xmlns:r="http://schemas.openxmlformats.org/officeDocument/2006/relationships" id="259" r:id="R28df51ad342b4703"/>
-    <p:sldId xmlns:r="http://schemas.openxmlformats.org/officeDocument/2006/relationships" id="260" r:id="R70764ec945e94e85"/>
-    <p:sldId xmlns:r="http://schemas.openxmlformats.org/officeDocument/2006/relationships" id="261" r:id="Rb1a5efa24c4d4c20"/>
-    <p:sldId xmlns:r="http://schemas.openxmlformats.org/officeDocument/2006/relationships" id="262" r:id="Rc0e682c36c534462"/>
-    <p:sldId xmlns:r="http://schemas.openxmlformats.org/officeDocument/2006/relationships" id="263" r:id="Rb262e7733a3247c1"/>
-    <p:sldId xmlns:r="http://schemas.openxmlformats.org/officeDocument/2006/relationships" id="264" r:id="Rddd392932e674c2d"/>
+    <p:sldId xmlns:r="http://schemas.openxmlformats.org/officeDocument/2006/relationships" id="256" r:id="Rbae8a5d1dabe4553"/>
+    <p:sldId xmlns:r="http://schemas.openxmlformats.org/officeDocument/2006/relationships" id="257" r:id="R7cf33f5d5fe341fc"/>
+    <p:sldId xmlns:r="http://schemas.openxmlformats.org/officeDocument/2006/relationships" id="258" r:id="R0d58883f71054d49"/>
+    <p:sldId xmlns:r="http://schemas.openxmlformats.org/officeDocument/2006/relationships" id="259" r:id="Rcc06d4420cfa4129"/>
+    <p:sldId xmlns:r="http://schemas.openxmlformats.org/officeDocument/2006/relationships" id="260" r:id="R2112bdcb6da74f19"/>
+    <p:sldId xmlns:r="http://schemas.openxmlformats.org/officeDocument/2006/relationships" id="261" r:id="Re1420c43df5a45ad"/>
+    <p:sldId xmlns:r="http://schemas.openxmlformats.org/officeDocument/2006/relationships" id="262" r:id="R0304f5d565ca43d9"/>
+    <p:sldId xmlns:r="http://schemas.openxmlformats.org/officeDocument/2006/relationships" id="263" r:id="Re730015ee81d4050"/>
+    <p:sldId xmlns:r="http://schemas.openxmlformats.org/officeDocument/2006/relationships" id="264" r:id="R5be44ab99cc04a59"/>
   </p:sldIdLst>
   <p:sldSz cx="12192000" cy="6858000"/>
   <p:notesSz cx="6858000" cy="9144000"/>
   <p:embeddedFontLst>
     <p:embeddedFont>
       <p:font typeface="JetBrains Mono"/>
-      <p:regular xmlns:r="http://schemas.openxmlformats.org/officeDocument/2006/relationships" r:id="R909a0e8ec68e4f2f"/>
+      <p:regular xmlns:r="http://schemas.openxmlformats.org/officeDocument/2006/relationships" r:id="R965280325c6242e5"/>
     </p:embeddedFont>
   </p:embeddedFontLst>
 </p:presentation>
@@ -1071,7 +1071,7 @@
           <p:nvPr/>
         </p:nvPicPr>
         <p:blipFill rotWithShape="1">
-          <a:blip xmlns:r="http://schemas.openxmlformats.org/officeDocument/2006/relationships" xmlns:a="http://schemas.openxmlformats.org/drawingml/2006/main" r:embed="R91b87af7539745f0"/>
+          <a:blip xmlns:r="http://schemas.openxmlformats.org/officeDocument/2006/relationships" xmlns:a="http://schemas.openxmlformats.org/drawingml/2006/main" r:embed="R82dc3c639a69409b"/>
           <a:stretch xmlns:a="http://schemas.openxmlformats.org/drawingml/2006/main"/>
         </p:blipFill>
         <p:spPr>
@@ -1451,7 +1451,7 @@
           <p:nvPr/>
         </p:nvPicPr>
         <p:blipFill rotWithShape="1">
-          <a:blip xmlns:r="http://schemas.openxmlformats.org/officeDocument/2006/relationships" xmlns:a="http://schemas.openxmlformats.org/drawingml/2006/main" r:embed="R8f791418c5eb42a2">
+          <a:blip xmlns:r="http://schemas.openxmlformats.org/officeDocument/2006/relationships" xmlns:a="http://schemas.openxmlformats.org/drawingml/2006/main" r:embed="Rc3bcd6699d204c5b">
             <a:alphaModFix amt="28000"/>
           </a:blip>
           <a:stretch xmlns:a="http://schemas.openxmlformats.org/drawingml/2006/main"/>
@@ -1664,7 +1664,7 @@
           <p:nvPr/>
         </p:nvPicPr>
         <p:blipFill rotWithShape="1">
-          <a:blip xmlns:r="http://schemas.openxmlformats.org/officeDocument/2006/relationships" xmlns:a="http://schemas.openxmlformats.org/drawingml/2006/main" r:embed="Ra6aa313bf1fe4297">
+          <a:blip xmlns:r="http://schemas.openxmlformats.org/officeDocument/2006/relationships" xmlns:a="http://schemas.openxmlformats.org/drawingml/2006/main" r:embed="R913a350a4ba34760">
             <a:alphaModFix amt="28000"/>
           </a:blip>
           <a:stretch xmlns:a="http://schemas.openxmlformats.org/drawingml/2006/main"/>
@@ -1899,7 +1899,7 @@
           <p:nvPr/>
         </p:nvPicPr>
         <p:blipFill rotWithShape="1">
-          <a:blip xmlns:r="http://schemas.openxmlformats.org/officeDocument/2006/relationships" xmlns:a="http://schemas.openxmlformats.org/drawingml/2006/main" r:embed="R67f0340ec39946aa">
+          <a:blip xmlns:r="http://schemas.openxmlformats.org/officeDocument/2006/relationships" xmlns:a="http://schemas.openxmlformats.org/drawingml/2006/main" r:embed="R2a0a412b5adf4146">
             <a:alphaModFix amt="28000"/>
           </a:blip>
           <a:stretch xmlns:a="http://schemas.openxmlformats.org/drawingml/2006/main"/>
@@ -2176,7 +2176,7 @@
           <p:nvPr/>
         </p:nvPicPr>
         <p:blipFill rotWithShape="1">
-          <a:blip xmlns:r="http://schemas.openxmlformats.org/officeDocument/2006/relationships" xmlns:a="http://schemas.openxmlformats.org/drawingml/2006/main" r:embed="R98307a77c17f452f">
+          <a:blip xmlns:r="http://schemas.openxmlformats.org/officeDocument/2006/relationships" xmlns:a="http://schemas.openxmlformats.org/drawingml/2006/main" r:embed="Ra79aaa44bc8148a1">
             <a:alphaModFix amt="28000"/>
           </a:blip>
           <a:stretch xmlns:a="http://schemas.openxmlformats.org/drawingml/2006/main"/>
@@ -2451,7 +2451,7 @@
           <p:nvPr/>
         </p:nvPicPr>
         <p:blipFill rotWithShape="1">
-          <a:blip xmlns:r="http://schemas.openxmlformats.org/officeDocument/2006/relationships" xmlns:a="http://schemas.openxmlformats.org/drawingml/2006/main" r:embed="R0adeba99ff254bb3">
+          <a:blip xmlns:r="http://schemas.openxmlformats.org/officeDocument/2006/relationships" xmlns:a="http://schemas.openxmlformats.org/drawingml/2006/main" r:embed="R7c1a8ac5185a4356">
             <a:alphaModFix amt="28000"/>
           </a:blip>
           <a:stretch xmlns:a="http://schemas.openxmlformats.org/drawingml/2006/main"/>
@@ -2875,7 +2875,7 @@
           <p:nvPr/>
         </p:nvPicPr>
         <p:blipFill rotWithShape="1">
-          <a:blip xmlns:r="http://schemas.openxmlformats.org/officeDocument/2006/relationships" xmlns:a="http://schemas.openxmlformats.org/drawingml/2006/main" r:embed="R153bb21a05e045a8">
+          <a:blip xmlns:r="http://schemas.openxmlformats.org/officeDocument/2006/relationships" xmlns:a="http://schemas.openxmlformats.org/drawingml/2006/main" r:embed="Rca6b2551830e416e">
             <a:alphaModFix amt="28000"/>
           </a:blip>
           <a:stretch xmlns:a="http://schemas.openxmlformats.org/drawingml/2006/main"/>
@@ -3016,7 +3016,7 @@
           <p:nvPr/>
         </p:nvPicPr>
         <p:blipFill rotWithShape="1">
-          <a:blip xmlns:r="http://schemas.openxmlformats.org/officeDocument/2006/relationships" xmlns:a="http://schemas.openxmlformats.org/drawingml/2006/main" r:embed="R25529b4875134119">
+          <a:blip xmlns:r="http://schemas.openxmlformats.org/officeDocument/2006/relationships" xmlns:a="http://schemas.openxmlformats.org/drawingml/2006/main" r:embed="R897eea7016254ec8">
             <a:alphaModFix amt="28000"/>
           </a:blip>
           <a:stretch xmlns:a="http://schemas.openxmlformats.org/drawingml/2006/main"/>
@@ -3130,7 +3130,7 @@
           <p:nvPr/>
         </p:nvPicPr>
         <p:blipFill rotWithShape="1">
-          <a:blip xmlns:r="http://schemas.openxmlformats.org/officeDocument/2006/relationships" xmlns:a="http://schemas.openxmlformats.org/drawingml/2006/main" r:embed="R442d40499e9c4a9f">
+          <a:blip xmlns:r="http://schemas.openxmlformats.org/officeDocument/2006/relationships" xmlns:a="http://schemas.openxmlformats.org/drawingml/2006/main" r:embed="R7bfb1c23e0bb4cf9">
             <a:alphaModFix amt="28000"/>
           </a:blip>
           <a:stretch xmlns:a="http://schemas.openxmlformats.org/drawingml/2006/main"/>
@@ -3457,7 +3457,7 @@
           <p:nvPr/>
         </p:nvPicPr>
         <p:blipFill rotWithShape="1">
-          <a:blip xmlns:r="http://schemas.openxmlformats.org/officeDocument/2006/relationships" xmlns:a="http://schemas.openxmlformats.org/drawingml/2006/main" r:embed="Rf6827a228e944f47">
+          <a:blip xmlns:r="http://schemas.openxmlformats.org/officeDocument/2006/relationships" xmlns:a="http://schemas.openxmlformats.org/drawingml/2006/main" r:embed="R2fc9bb4708ce4b38">
             <a:alphaModFix amt="28000"/>
           </a:blip>
           <a:stretch xmlns:a="http://schemas.openxmlformats.org/drawingml/2006/main"/>
@@ -3745,7 +3745,7 @@
           <p:nvPr/>
         </p:nvPicPr>
         <p:blipFill rotWithShape="1">
-          <a:blip xmlns:r="http://schemas.openxmlformats.org/officeDocument/2006/relationships" xmlns:a="http://schemas.openxmlformats.org/drawingml/2006/main" r:embed="R8c3ea0b7fae44fde">
+          <a:blip xmlns:r="http://schemas.openxmlformats.org/officeDocument/2006/relationships" xmlns:a="http://schemas.openxmlformats.org/drawingml/2006/main" r:embed="R3d12f3f6bf324ed2">
             <a:alphaModFix amt="28000"/>
           </a:blip>
           <a:stretch xmlns:a="http://schemas.openxmlformats.org/drawingml/2006/main"/>
@@ -3982,17 +3982,17 @@
   </p:cSld>
   <p:clrMap bg1="lt1" tx1="dk1" bg2="lt2" tx2="dk2" accent1="accent1" accent2="accent2" accent3="accent3" accent4="accent4" accent5="accent5" accent6="accent6" hlink="hlink" folHlink="folHlink"/>
   <p:sldLayoutIdLst>
-    <p:sldLayoutId xmlns:r="http://schemas.openxmlformats.org/officeDocument/2006/relationships" id="2147483649" r:id="Re4cb6e0281c146f3"/>
-    <p:sldLayoutId xmlns:r="http://schemas.openxmlformats.org/officeDocument/2006/relationships" id="2147483650" r:id="R7d442cb2f93d4f44"/>
-    <p:sldLayoutId xmlns:r="http://schemas.openxmlformats.org/officeDocument/2006/relationships" id="2147483651" r:id="R480be907c2384ac6"/>
-    <p:sldLayoutId xmlns:r="http://schemas.openxmlformats.org/officeDocument/2006/relationships" id="2147483652" r:id="Rd2771701767f4583"/>
-    <p:sldLayoutId xmlns:r="http://schemas.openxmlformats.org/officeDocument/2006/relationships" id="2147483653" r:id="R29c5d0e31eb54e7a"/>
-    <p:sldLayoutId xmlns:r="http://schemas.openxmlformats.org/officeDocument/2006/relationships" id="2147483654" r:id="Rcb0e07aa104c4f25"/>
-    <p:sldLayoutId xmlns:r="http://schemas.openxmlformats.org/officeDocument/2006/relationships" id="2147483655" r:id="R4bf8c6ddb6974db0"/>
-    <p:sldLayoutId xmlns:r="http://schemas.openxmlformats.org/officeDocument/2006/relationships" id="2147483656" r:id="R1e66304d1c05425f"/>
-    <p:sldLayoutId xmlns:r="http://schemas.openxmlformats.org/officeDocument/2006/relationships" id="2147483657" r:id="Rc407163458a74a97"/>
-    <p:sldLayoutId xmlns:r="http://schemas.openxmlformats.org/officeDocument/2006/relationships" id="2147483658" r:id="Re92b5bba30d94605"/>
-    <p:sldLayoutId xmlns:r="http://schemas.openxmlformats.org/officeDocument/2006/relationships" id="2147483659" r:id="R8ca89803f0c64599"/>
+    <p:sldLayoutId xmlns:r="http://schemas.openxmlformats.org/officeDocument/2006/relationships" id="2147483649" r:id="R5aa963b0d75740e2"/>
+    <p:sldLayoutId xmlns:r="http://schemas.openxmlformats.org/officeDocument/2006/relationships" id="2147483650" r:id="Rbcfe961c85aa4b18"/>
+    <p:sldLayoutId xmlns:r="http://schemas.openxmlformats.org/officeDocument/2006/relationships" id="2147483651" r:id="Ra03fd748ac0e412d"/>
+    <p:sldLayoutId xmlns:r="http://schemas.openxmlformats.org/officeDocument/2006/relationships" id="2147483652" r:id="R0a92e29854d445b1"/>
+    <p:sldLayoutId xmlns:r="http://schemas.openxmlformats.org/officeDocument/2006/relationships" id="2147483653" r:id="Rbc2321cd2e454c62"/>
+    <p:sldLayoutId xmlns:r="http://schemas.openxmlformats.org/officeDocument/2006/relationships" id="2147483654" r:id="Rb065bfad47be41a5"/>
+    <p:sldLayoutId xmlns:r="http://schemas.openxmlformats.org/officeDocument/2006/relationships" id="2147483655" r:id="R7a848a3353894650"/>
+    <p:sldLayoutId xmlns:r="http://schemas.openxmlformats.org/officeDocument/2006/relationships" id="2147483656" r:id="R6530db7750f04ace"/>
+    <p:sldLayoutId xmlns:r="http://schemas.openxmlformats.org/officeDocument/2006/relationships" id="2147483657" r:id="R577fd149ac044e75"/>
+    <p:sldLayoutId xmlns:r="http://schemas.openxmlformats.org/officeDocument/2006/relationships" id="2147483658" r:id="Rb44496fda864457a"/>
+    <p:sldLayoutId xmlns:r="http://schemas.openxmlformats.org/officeDocument/2006/relationships" id="2147483659" r:id="Radafdf32ddbe4c5f"/>
   </p:sldLayoutIdLst>
   <p:hf hdr="0" ftr="0" dt="0"/>
   <p:txStyles>
@@ -7417,18 +7417,21 @@
                 <a:ea typeface="Calibri"/>
                 <a:cs typeface="Calibri"/>
               </a:rPr>
-              <a:t>Keep the user's deletion. Display the new first task with the label </a:t>
-            </a:r>
-            <a:r>
-              <a:rPr sz="2400" b="0">
-                <a:solidFill>
-                  <a:srgbClr val="067D17"/>
-                </a:solidFill>
-                <a:latin typeface="JetBrains Mono"/>
-                <a:ea typeface="JetBrains Mono"/>
-                <a:cs typeface="JetBrains Mono"/>
-              </a:rPr>
-              <a:t>"Next:"</a:t>
+              <a:t>Change the example so it shows which task moved up. After the deletion, display the item now at </a:t>
+            </a:r>
+            <a:r>
+              <a:rPr sz="2050" b="0">
+                <a:solidFill>
+                  <a:srgbClr val="6A1B9A"/>
+                </a:solidFill>
+                <a:highlight>
+                  <a:srgbClr val="ECEAF4"/>
+                </a:highlight>
+                <a:latin typeface="JetBrains Mono"/>
+                <a:ea typeface="JetBrains Mono"/>
+                <a:cs typeface="JetBrains Mono"/>
+              </a:rPr>
+              <a:t> position </a:t>
             </a:r>
             <a:r>
               <a:rPr sz="2400" b="0">
@@ -7439,10 +7442,10 @@
                 <a:ea typeface="Calibri"/>
                 <a:cs typeface="Calibri"/>
               </a:rPr>
-              <a:t>. Test position 0; </a:t>
-            </a:r>
-            <a:r>
-              <a:rPr sz="2400" b="0">
+              <a:t> after </a:t>
+            </a:r>
+            <a:r>
+              <a:rPr sz="2050" b="0">
                 <a:solidFill>
                   <a:srgbClr val="067D17"/>
                 </a:solidFill>
@@ -7450,7 +7453,7 @@
                 <a:ea typeface="JetBrains Mono"/>
                 <a:cs typeface="JetBrains Mono"/>
               </a:rPr>
-              <a:t>"email"</a:t>
+              <a:t>"Moved up:"</a:t>
             </a:r>
             <a:r>
               <a:rPr sz="2400" b="0">
@@ -7461,10 +7464,10 @@
                 <a:ea typeface="Calibri"/>
                 <a:cs typeface="Calibri"/>
               </a:rPr>
-              <a:t> should be completed and </a:t>
-            </a:r>
-            <a:r>
-              <a:rPr sz="2400" b="0">
+              <a:t>. Only use positions 0 to 2. For example, 1 displays </a:t>
+            </a:r>
+            <a:r>
+              <a:rPr sz="2050" b="0">
                 <a:solidFill>
                   <a:srgbClr val="067D17"/>
                 </a:solidFill>
@@ -7472,7 +7475,7 @@
                 <a:ea typeface="JetBrains Mono"/>
                 <a:cs typeface="JetBrains Mono"/>
               </a:rPr>
-              <a:t>"design"</a:t>
+              <a:t>"Completed: design"</a:t>
             </a:r>
             <a:r>
               <a:rPr sz="2400" b="0">
@@ -7483,7 +7486,29 @@
                 <a:ea typeface="Calibri"/>
                 <a:cs typeface="Calibri"/>
               </a:rPr>
-              <a:t> should be next.</a:t>
+              <a:t> and </a:t>
+            </a:r>
+            <a:r>
+              <a:rPr sz="2050" b="0">
+                <a:solidFill>
+                  <a:srgbClr val="067D17"/>
+                </a:solidFill>
+                <a:latin typeface="JetBrains Mono"/>
+                <a:ea typeface="JetBrains Mono"/>
+                <a:cs typeface="JetBrains Mono"/>
+              </a:rPr>
+              <a:t>"Moved up: test"</a:t>
+            </a:r>
+            <a:r>
+              <a:rPr sz="2400" b="0">
+                <a:solidFill>
+                  <a:srgbClr val="080808"/>
+                </a:solidFill>
+                <a:latin typeface="Calibri"/>
+                <a:ea typeface="Calibri"/>
+                <a:cs typeface="Calibri"/>
+              </a:rPr>
+              <a:t>.</a:t>
             </a:r>
           </a:p>
         </p:txBody>
@@ -8194,18 +8219,18 @@
                 <a:ea typeface="Calibri"/>
                 <a:cs typeface="Calibri"/>
               </a:rPr>
-              <a:t>After the first deletion, ask for a second valid position in the shortened </a:t>
-            </a:r>
-            <a:r>
-              <a:rPr sz="2400" b="0">
-                <a:solidFill>
-                  <a:srgbClr val="1750EB"/>
-                </a:solidFill>
-                <a:latin typeface="JetBrains Mono"/>
-                <a:ea typeface="JetBrains Mono"/>
-                <a:cs typeface="JetBrains Mono"/>
-              </a:rPr>
-              <a:t>list</a:t>
+              <a:t>Extend the example so it deletes a second task. After the first deletion, ask for a position from 0 to 2, store that task, then delete it. Display both tasks after </a:t>
+            </a:r>
+            <a:r>
+              <a:rPr sz="2050" b="0">
+                <a:solidFill>
+                  <a:srgbClr val="067D17"/>
+                </a:solidFill>
+                <a:latin typeface="JetBrains Mono"/>
+                <a:ea typeface="JetBrains Mono"/>
+                <a:cs typeface="JetBrains Mono"/>
+              </a:rPr>
+              <a:t>"Completed:"</a:t>
             </a:r>
             <a:r>
               <a:rPr sz="2400" b="0">
@@ -8216,7 +8241,51 @@
                 <a:ea typeface="Calibri"/>
                 <a:cs typeface="Calibri"/>
               </a:rPr>
-              <a:t>. Label and delete that item, then display what remains. Test the program by entering 1 for both positions.</a:t>
+              <a:t>. For example, 1 and 1 display </a:t>
+            </a:r>
+            <a:r>
+              <a:rPr sz="2050" b="0">
+                <a:solidFill>
+                  <a:srgbClr val="067D17"/>
+                </a:solidFill>
+                <a:latin typeface="JetBrains Mono"/>
+                <a:ea typeface="JetBrains Mono"/>
+                <a:cs typeface="JetBrains Mono"/>
+              </a:rPr>
+              <a:t>"Completed: design test"</a:t>
+            </a:r>
+            <a:r>
+              <a:rPr sz="2400" b="0">
+                <a:solidFill>
+                  <a:srgbClr val="080808"/>
+                </a:solidFill>
+                <a:latin typeface="Calibri"/>
+                <a:ea typeface="Calibri"/>
+                <a:cs typeface="Calibri"/>
+              </a:rPr>
+              <a:t> and </a:t>
+            </a:r>
+            <a:r>
+              <a:rPr sz="2050" b="0">
+                <a:solidFill>
+                  <a:srgbClr val="067D17"/>
+                </a:solidFill>
+                <a:latin typeface="JetBrains Mono"/>
+                <a:ea typeface="JetBrains Mono"/>
+                <a:cs typeface="JetBrains Mono"/>
+              </a:rPr>
+              <a:t>"Remaining: ['email', 'publish']"</a:t>
+            </a:r>
+            <a:r>
+              <a:rPr sz="2400" b="0">
+                <a:solidFill>
+                  <a:srgbClr val="080808"/>
+                </a:solidFill>
+                <a:latin typeface="Calibri"/>
+                <a:ea typeface="Calibri"/>
+                <a:cs typeface="Calibri"/>
+              </a:rPr>
+              <a:t>.</a:t>
             </a:r>
           </a:p>
         </p:txBody>
@@ -8908,7 +8977,7 @@
         </p:spPr>
         <p:txBody>
           <a:bodyPr xmlns:a="http://schemas.openxmlformats.org/drawingml/2006/main">
-            <a:normAutofit fontScale="85495"/>
+            <a:normAutofit fontScale="99711"/>
           </a:bodyPr>
           <a:lstStyle xmlns:a="http://schemas.openxmlformats.org/drawingml/2006/main"/>
           <a:p xmlns:a="http://schemas.openxmlformats.org/drawingml/2006/main">
@@ -8927,18 +8996,18 @@
                 <a:ea typeface="Calibri"/>
                 <a:cs typeface="Calibri"/>
               </a:rPr>
-              <a:t>Store </a:t>
-            </a:r>
-            <a:r>
-              <a:rPr sz="2400" b="0">
-                <a:solidFill>
-                  <a:srgbClr val="067D17"/>
-                </a:solidFill>
-                <a:latin typeface="JetBrains Mono"/>
-                <a:ea typeface="JetBrains Mono"/>
-                <a:cs typeface="JetBrains Mono"/>
-              </a:rPr>
-              <a:t>"Ari"</a:t>
+              <a:t>Create a </a:t>
+            </a:r>
+            <a:r>
+              <a:rPr sz="2050" b="0">
+                <a:solidFill>
+                  <a:srgbClr val="1750EB"/>
+                </a:solidFill>
+                <a:latin typeface="JetBrains Mono"/>
+                <a:ea typeface="JetBrains Mono"/>
+                <a:cs typeface="JetBrains Mono"/>
+              </a:rPr>
+              <a:t>list</a:t>
             </a:r>
             <a:r>
               <a:rPr sz="2400" b="0">
@@ -8949,18 +9018,21 @@
                 <a:ea typeface="Calibri"/>
                 <a:cs typeface="Calibri"/>
               </a:rPr>
-              <a:t>, </a:t>
-            </a:r>
-            <a:r>
-              <a:rPr sz="2400" b="0">
-                <a:solidFill>
-                  <a:srgbClr val="067D17"/>
-                </a:solidFill>
-                <a:latin typeface="JetBrains Mono"/>
-                <a:ea typeface="JetBrains Mono"/>
-                <a:cs typeface="JetBrains Mono"/>
-              </a:rPr>
-              <a:t>"Bao"</a:t>
+              <a:t> called </a:t>
+            </a:r>
+            <a:r>
+              <a:rPr sz="2050" b="0">
+                <a:solidFill>
+                  <a:srgbClr val="6A1B9A"/>
+                </a:solidFill>
+                <a:highlight>
+                  <a:srgbClr val="ECEAF4"/>
+                </a:highlight>
+                <a:latin typeface="JetBrains Mono"/>
+                <a:ea typeface="JetBrains Mono"/>
+                <a:cs typeface="JetBrains Mono"/>
+              </a:rPr>
+              <a:t> queue </a:t>
             </a:r>
             <a:r>
               <a:rPr sz="2400" b="0">
@@ -8971,10 +9043,10 @@
                 <a:ea typeface="Calibri"/>
                 <a:cs typeface="Calibri"/>
               </a:rPr>
-              <a:t>, </a:t>
-            </a:r>
-            <a:r>
-              <a:rPr sz="2400" b="0">
+              <a:t> holding </a:t>
+            </a:r>
+            <a:r>
+              <a:rPr sz="2050" b="0">
                 <a:solidFill>
                   <a:srgbClr val="067D17"/>
                 </a:solidFill>
@@ -8982,7 +9054,7 @@
                 <a:ea typeface="JetBrains Mono"/>
                 <a:cs typeface="JetBrains Mono"/>
               </a:rPr>
-              <a:t>"Cleo"</a:t>
+              <a:t>"Ari"</a:t>
             </a:r>
             <a:r>
               <a:rPr sz="2400" b="0">
@@ -8993,10 +9065,10 @@
                 <a:ea typeface="Calibri"/>
                 <a:cs typeface="Calibri"/>
               </a:rPr>
-              <a:t> and </a:t>
-            </a:r>
-            <a:r>
-              <a:rPr sz="2400" b="0">
+              <a:t>, </a:t>
+            </a:r>
+            <a:r>
+              <a:rPr sz="2050" b="0">
                 <a:solidFill>
                   <a:srgbClr val="067D17"/>
                 </a:solidFill>
@@ -9004,7 +9076,7 @@
                 <a:ea typeface="JetBrains Mono"/>
                 <a:cs typeface="JetBrains Mono"/>
               </a:rPr>
-              <a:t>"Dara"</a:t>
+              <a:t>"Bao"</a:t>
             </a:r>
             <a:r>
               <a:rPr sz="2400" b="0">
@@ -9015,10 +9087,10 @@
                 <a:ea typeface="Calibri"/>
                 <a:cs typeface="Calibri"/>
               </a:rPr>
-              <a:t> in [queue]. Ask for a cancellation position from 0 to 3 and store it in [position]. Store the selected name in [cancelled], delete it from [queue], and display </a:t>
-            </a:r>
-            <a:r>
-              <a:rPr sz="2400" b="0">
+              <a:t>, </a:t>
+            </a:r>
+            <a:r>
+              <a:rPr sz="2050" b="0">
                 <a:solidFill>
                   <a:srgbClr val="067D17"/>
                 </a:solidFill>
@@ -9026,7 +9098,7 @@
                 <a:ea typeface="JetBrains Mono"/>
                 <a:cs typeface="JetBrains Mono"/>
               </a:rPr>
-              <a:t>"Cancelled:"</a:t>
+              <a:t>"Cleo"</a:t>
             </a:r>
             <a:r>
               <a:rPr sz="2400" b="0">
@@ -9037,18 +9109,18 @@
                 <a:ea typeface="Calibri"/>
                 <a:cs typeface="Calibri"/>
               </a:rPr>
-              <a:t> followed by [cancelled]. Use a </a:t>
-            </a:r>
-            <a:r>
-              <a:rPr sz="2400" b="0">
-                <a:solidFill>
-                  <a:srgbClr val="1750EB"/>
-                </a:solidFill>
-                <a:latin typeface="JetBrains Mono"/>
-                <a:ea typeface="JetBrains Mono"/>
-                <a:cs typeface="JetBrains Mono"/>
-              </a:rPr>
-              <a:t>for</a:t>
+              <a:t> and </a:t>
+            </a:r>
+            <a:r>
+              <a:rPr sz="2050" b="0">
+                <a:solidFill>
+                  <a:srgbClr val="067D17"/>
+                </a:solidFill>
+                <a:latin typeface="JetBrains Mono"/>
+                <a:ea typeface="JetBrains Mono"/>
+                <a:cs typeface="JetBrains Mono"/>
+              </a:rPr>
+              <a:t>"Dara"</a:t>
             </a:r>
             <a:r>
               <a:rPr sz="2400" b="0">
@@ -9059,18 +9131,21 @@
                 <a:ea typeface="Calibri"/>
                 <a:cs typeface="Calibri"/>
               </a:rPr>
-              <a:t> loop and a counter called [number] to display the position and name of each remaining person. Test position 1; the remaining lines must be </a:t>
-            </a:r>
-            <a:r>
-              <a:rPr sz="2400" b="0">
-                <a:solidFill>
-                  <a:srgbClr val="067D17"/>
-                </a:solidFill>
-                <a:latin typeface="JetBrains Mono"/>
-                <a:ea typeface="JetBrains Mono"/>
-                <a:cs typeface="JetBrains Mono"/>
-              </a:rPr>
-              <a:t>"0 Ari"</a:t>
+              <a:t>. Serve the first person: store them in </a:t>
+            </a:r>
+            <a:r>
+              <a:rPr sz="2050" b="0">
+                <a:solidFill>
+                  <a:srgbClr val="6A1B9A"/>
+                </a:solidFill>
+                <a:highlight>
+                  <a:srgbClr val="ECEAF4"/>
+                </a:highlight>
+                <a:latin typeface="JetBrains Mono"/>
+                <a:ea typeface="JetBrains Mono"/>
+                <a:cs typeface="JetBrains Mono"/>
+              </a:rPr>
+              <a:t> served </a:t>
             </a:r>
             <a:r>
               <a:rPr sz="2400" b="0">
@@ -9081,10 +9156,10 @@
                 <a:ea typeface="Calibri"/>
                 <a:cs typeface="Calibri"/>
               </a:rPr>
-              <a:t>, </a:t>
-            </a:r>
-            <a:r>
-              <a:rPr sz="2400" b="0">
+              <a:t>, delete position 0 and display </a:t>
+            </a:r>
+            <a:r>
+              <a:rPr sz="2050" b="0">
                 <a:solidFill>
                   <a:srgbClr val="067D17"/>
                 </a:solidFill>
@@ -9092,7 +9167,7 @@
                 <a:ea typeface="JetBrains Mono"/>
                 <a:cs typeface="JetBrains Mono"/>
               </a:rPr>
-              <a:t>"1 Cleo"</a:t>
+              <a:t>"Served:"</a:t>
             </a:r>
             <a:r>
               <a:rPr sz="2400" b="0">
@@ -9103,18 +9178,62 @@
                 <a:ea typeface="Calibri"/>
                 <a:cs typeface="Calibri"/>
               </a:rPr>
-              <a:t> and </a:t>
+              <a:t> with the name. Then ask for a position from 0 to 2, delete that name and display the </a:t>
+            </a:r>
+            <a:r>
+              <a:rPr sz="2050" b="0">
+                <a:solidFill>
+                  <a:srgbClr val="1750EB"/>
+                </a:solidFill>
+                <a:latin typeface="JetBrains Mono"/>
+                <a:ea typeface="JetBrains Mono"/>
+                <a:cs typeface="JetBrains Mono"/>
+              </a:rPr>
+              <a:t>list</a:t>
             </a:r>
             <a:r>
               <a:rPr sz="2400" b="0">
                 <a:solidFill>
+                  <a:srgbClr val="080808"/>
+                </a:solidFill>
+                <a:latin typeface="Calibri"/>
+                <a:ea typeface="Calibri"/>
+                <a:cs typeface="Calibri"/>
+              </a:rPr>
+              <a:t> after </a:t>
+            </a:r>
+            <a:r>
+              <a:rPr sz="2050" b="0">
+                <a:solidFill>
                   <a:srgbClr val="067D17"/>
                 </a:solidFill>
                 <a:latin typeface="JetBrains Mono"/>
                 <a:ea typeface="JetBrains Mono"/>
                 <a:cs typeface="JetBrains Mono"/>
               </a:rPr>
-              <a:t>"2 Dara"</a:t>
+              <a:t>"Queue:"</a:t>
+            </a:r>
+            <a:r>
+              <a:rPr sz="2400" b="0">
+                <a:solidFill>
+                  <a:srgbClr val="080808"/>
+                </a:solidFill>
+                <a:latin typeface="Calibri"/>
+                <a:ea typeface="Calibri"/>
+                <a:cs typeface="Calibri"/>
+              </a:rPr>
+              <a:t>. For example, 1 gives </a:t>
+            </a:r>
+            <a:r>
+              <a:rPr sz="2050" b="0">
+                <a:solidFill>
+                  <a:srgbClr val="067D17"/>
+                </a:solidFill>
+                <a:latin typeface="JetBrains Mono"/>
+                <a:ea typeface="JetBrains Mono"/>
+                <a:cs typeface="JetBrains Mono"/>
+              </a:rPr>
+              <a:t>"Queue: ['Bao', 'Dara']"</a:t>
             </a:r>
             <a:r>
               <a:rPr sz="2400" b="0">

--- a/Mapped Curriculum Lessons/Grade 7/Lesson 24 - Deleting by List Position/Deleting by List Position - Slides.pptx
+++ b/Mapped Curriculum Lessons/Grade 7/Lesson 24 - Deleting by List Position/Deleting by List Position - Slides.pptx
@@ -2,28 +2,28 @@
 <file path=ppt/presentation.xml><?xml version="1.0" encoding="utf-8"?>
 <p:presentation xmlns:p="http://schemas.openxmlformats.org/presentationml/2006/main" embedTrueTypeFonts="1" saveSubsetFonts="0">
   <p:sldMasterIdLst>
-    <p:sldMasterId xmlns:r="http://schemas.openxmlformats.org/officeDocument/2006/relationships" id="2147483648" r:id="R62dbcfc7fa6b4a5f"/>
+    <p:sldMasterId xmlns:r="http://schemas.openxmlformats.org/officeDocument/2006/relationships" id="2147483648" r:id="Rb47582a31cc145f1"/>
   </p:sldMasterIdLst>
   <p:notesMasterIdLst>
-    <p:notesMasterId xmlns:r="http://schemas.openxmlformats.org/officeDocument/2006/relationships" r:id="R362fbf9f2897436f"/>
+    <p:notesMasterId xmlns:r="http://schemas.openxmlformats.org/officeDocument/2006/relationships" r:id="Rdf71844978c646fa"/>
   </p:notesMasterIdLst>
   <p:sldIdLst>
-    <p:sldId xmlns:r="http://schemas.openxmlformats.org/officeDocument/2006/relationships" id="256" r:id="Rbae8a5d1dabe4553"/>
-    <p:sldId xmlns:r="http://schemas.openxmlformats.org/officeDocument/2006/relationships" id="257" r:id="R7cf33f5d5fe341fc"/>
-    <p:sldId xmlns:r="http://schemas.openxmlformats.org/officeDocument/2006/relationships" id="258" r:id="R0d58883f71054d49"/>
-    <p:sldId xmlns:r="http://schemas.openxmlformats.org/officeDocument/2006/relationships" id="259" r:id="Rcc06d4420cfa4129"/>
-    <p:sldId xmlns:r="http://schemas.openxmlformats.org/officeDocument/2006/relationships" id="260" r:id="R2112bdcb6da74f19"/>
-    <p:sldId xmlns:r="http://schemas.openxmlformats.org/officeDocument/2006/relationships" id="261" r:id="Re1420c43df5a45ad"/>
-    <p:sldId xmlns:r="http://schemas.openxmlformats.org/officeDocument/2006/relationships" id="262" r:id="R0304f5d565ca43d9"/>
-    <p:sldId xmlns:r="http://schemas.openxmlformats.org/officeDocument/2006/relationships" id="263" r:id="Re730015ee81d4050"/>
-    <p:sldId xmlns:r="http://schemas.openxmlformats.org/officeDocument/2006/relationships" id="264" r:id="R5be44ab99cc04a59"/>
+    <p:sldId xmlns:r="http://schemas.openxmlformats.org/officeDocument/2006/relationships" id="256" r:id="R60be6a0aae3f4613"/>
+    <p:sldId xmlns:r="http://schemas.openxmlformats.org/officeDocument/2006/relationships" id="257" r:id="R96df0160591e474d"/>
+    <p:sldId xmlns:r="http://schemas.openxmlformats.org/officeDocument/2006/relationships" id="258" r:id="Reaa472601858401e"/>
+    <p:sldId xmlns:r="http://schemas.openxmlformats.org/officeDocument/2006/relationships" id="259" r:id="Ra154fa8910cd4ac1"/>
+    <p:sldId xmlns:r="http://schemas.openxmlformats.org/officeDocument/2006/relationships" id="260" r:id="R70f4673b59f2448e"/>
+    <p:sldId xmlns:r="http://schemas.openxmlformats.org/officeDocument/2006/relationships" id="261" r:id="R9cbb72484cc64f6e"/>
+    <p:sldId xmlns:r="http://schemas.openxmlformats.org/officeDocument/2006/relationships" id="262" r:id="Rb78c2e7a25f24ccf"/>
+    <p:sldId xmlns:r="http://schemas.openxmlformats.org/officeDocument/2006/relationships" id="263" r:id="Rddea5f391a714130"/>
+    <p:sldId xmlns:r="http://schemas.openxmlformats.org/officeDocument/2006/relationships" id="264" r:id="Ref82f4c8482f466a"/>
   </p:sldIdLst>
   <p:sldSz cx="12192000" cy="6858000"/>
   <p:notesSz cx="6858000" cy="9144000"/>
   <p:embeddedFontLst>
     <p:embeddedFont>
       <p:font typeface="JetBrains Mono"/>
-      <p:regular xmlns:r="http://schemas.openxmlformats.org/officeDocument/2006/relationships" r:id="R965280325c6242e5"/>
+      <p:regular xmlns:r="http://schemas.openxmlformats.org/officeDocument/2006/relationships" r:id="R6b06db2bddd74b19"/>
     </p:embeddedFont>
   </p:embeddedFontLst>
 </p:presentation>
@@ -1071,7 +1071,7 @@
           <p:nvPr/>
         </p:nvPicPr>
         <p:blipFill rotWithShape="1">
-          <a:blip xmlns:r="http://schemas.openxmlformats.org/officeDocument/2006/relationships" xmlns:a="http://schemas.openxmlformats.org/drawingml/2006/main" r:embed="R82dc3c639a69409b"/>
+          <a:blip xmlns:r="http://schemas.openxmlformats.org/officeDocument/2006/relationships" xmlns:a="http://schemas.openxmlformats.org/drawingml/2006/main" r:embed="R608d68928cc24582"/>
           <a:stretch xmlns:a="http://schemas.openxmlformats.org/drawingml/2006/main"/>
         </p:blipFill>
         <p:spPr>
@@ -1451,7 +1451,7 @@
           <p:nvPr/>
         </p:nvPicPr>
         <p:blipFill rotWithShape="1">
-          <a:blip xmlns:r="http://schemas.openxmlformats.org/officeDocument/2006/relationships" xmlns:a="http://schemas.openxmlformats.org/drawingml/2006/main" r:embed="Rc3bcd6699d204c5b">
+          <a:blip xmlns:r="http://schemas.openxmlformats.org/officeDocument/2006/relationships" xmlns:a="http://schemas.openxmlformats.org/drawingml/2006/main" r:embed="R0056fc07722b42a5">
             <a:alphaModFix amt="28000"/>
           </a:blip>
           <a:stretch xmlns:a="http://schemas.openxmlformats.org/drawingml/2006/main"/>
@@ -1664,7 +1664,7 @@
           <p:nvPr/>
         </p:nvPicPr>
         <p:blipFill rotWithShape="1">
-          <a:blip xmlns:r="http://schemas.openxmlformats.org/officeDocument/2006/relationships" xmlns:a="http://schemas.openxmlformats.org/drawingml/2006/main" r:embed="R913a350a4ba34760">
+          <a:blip xmlns:r="http://schemas.openxmlformats.org/officeDocument/2006/relationships" xmlns:a="http://schemas.openxmlformats.org/drawingml/2006/main" r:embed="R82f5e9eb9d294834">
             <a:alphaModFix amt="28000"/>
           </a:blip>
           <a:stretch xmlns:a="http://schemas.openxmlformats.org/drawingml/2006/main"/>
@@ -1899,7 +1899,7 @@
           <p:nvPr/>
         </p:nvPicPr>
         <p:blipFill rotWithShape="1">
-          <a:blip xmlns:r="http://schemas.openxmlformats.org/officeDocument/2006/relationships" xmlns:a="http://schemas.openxmlformats.org/drawingml/2006/main" r:embed="R2a0a412b5adf4146">
+          <a:blip xmlns:r="http://schemas.openxmlformats.org/officeDocument/2006/relationships" xmlns:a="http://schemas.openxmlformats.org/drawingml/2006/main" r:embed="R28a6e728eb6f46ce">
             <a:alphaModFix amt="28000"/>
           </a:blip>
           <a:stretch xmlns:a="http://schemas.openxmlformats.org/drawingml/2006/main"/>
@@ -2176,7 +2176,7 @@
           <p:nvPr/>
         </p:nvPicPr>
         <p:blipFill rotWithShape="1">
-          <a:blip xmlns:r="http://schemas.openxmlformats.org/officeDocument/2006/relationships" xmlns:a="http://schemas.openxmlformats.org/drawingml/2006/main" r:embed="Ra79aaa44bc8148a1">
+          <a:blip xmlns:r="http://schemas.openxmlformats.org/officeDocument/2006/relationships" xmlns:a="http://schemas.openxmlformats.org/drawingml/2006/main" r:embed="R49938f9b83494795">
             <a:alphaModFix amt="28000"/>
           </a:blip>
           <a:stretch xmlns:a="http://schemas.openxmlformats.org/drawingml/2006/main"/>
@@ -2451,7 +2451,7 @@
           <p:nvPr/>
         </p:nvPicPr>
         <p:blipFill rotWithShape="1">
-          <a:blip xmlns:r="http://schemas.openxmlformats.org/officeDocument/2006/relationships" xmlns:a="http://schemas.openxmlformats.org/drawingml/2006/main" r:embed="R7c1a8ac5185a4356">
+          <a:blip xmlns:r="http://schemas.openxmlformats.org/officeDocument/2006/relationships" xmlns:a="http://schemas.openxmlformats.org/drawingml/2006/main" r:embed="Rd2cfd52b8e6d4623">
             <a:alphaModFix amt="28000"/>
           </a:blip>
           <a:stretch xmlns:a="http://schemas.openxmlformats.org/drawingml/2006/main"/>
@@ -2875,7 +2875,7 @@
           <p:nvPr/>
         </p:nvPicPr>
         <p:blipFill rotWithShape="1">
-          <a:blip xmlns:r="http://schemas.openxmlformats.org/officeDocument/2006/relationships" xmlns:a="http://schemas.openxmlformats.org/drawingml/2006/main" r:embed="Rca6b2551830e416e">
+          <a:blip xmlns:r="http://schemas.openxmlformats.org/officeDocument/2006/relationships" xmlns:a="http://schemas.openxmlformats.org/drawingml/2006/main" r:embed="Rb3e2fed5dba045f9">
             <a:alphaModFix amt="28000"/>
           </a:blip>
           <a:stretch xmlns:a="http://schemas.openxmlformats.org/drawingml/2006/main"/>
@@ -3016,7 +3016,7 @@
           <p:nvPr/>
         </p:nvPicPr>
         <p:blipFill rotWithShape="1">
-          <a:blip xmlns:r="http://schemas.openxmlformats.org/officeDocument/2006/relationships" xmlns:a="http://schemas.openxmlformats.org/drawingml/2006/main" r:embed="R897eea7016254ec8">
+          <a:blip xmlns:r="http://schemas.openxmlformats.org/officeDocument/2006/relationships" xmlns:a="http://schemas.openxmlformats.org/drawingml/2006/main" r:embed="Rad138b4a12814820">
             <a:alphaModFix amt="28000"/>
           </a:blip>
           <a:stretch xmlns:a="http://schemas.openxmlformats.org/drawingml/2006/main"/>
@@ -3130,7 +3130,7 @@
           <p:nvPr/>
         </p:nvPicPr>
         <p:blipFill rotWithShape="1">
-          <a:blip xmlns:r="http://schemas.openxmlformats.org/officeDocument/2006/relationships" xmlns:a="http://schemas.openxmlformats.org/drawingml/2006/main" r:embed="R7bfb1c23e0bb4cf9">
+          <a:blip xmlns:r="http://schemas.openxmlformats.org/officeDocument/2006/relationships" xmlns:a="http://schemas.openxmlformats.org/drawingml/2006/main" r:embed="R106385213c174224">
             <a:alphaModFix amt="28000"/>
           </a:blip>
           <a:stretch xmlns:a="http://schemas.openxmlformats.org/drawingml/2006/main"/>
@@ -3457,7 +3457,7 @@
           <p:nvPr/>
         </p:nvPicPr>
         <p:blipFill rotWithShape="1">
-          <a:blip xmlns:r="http://schemas.openxmlformats.org/officeDocument/2006/relationships" xmlns:a="http://schemas.openxmlformats.org/drawingml/2006/main" r:embed="R2fc9bb4708ce4b38">
+          <a:blip xmlns:r="http://schemas.openxmlformats.org/officeDocument/2006/relationships" xmlns:a="http://schemas.openxmlformats.org/drawingml/2006/main" r:embed="R20e1bfbf90314c5f">
             <a:alphaModFix amt="28000"/>
           </a:blip>
           <a:stretch xmlns:a="http://schemas.openxmlformats.org/drawingml/2006/main"/>
@@ -3745,7 +3745,7 @@
           <p:nvPr/>
         </p:nvPicPr>
         <p:blipFill rotWithShape="1">
-          <a:blip xmlns:r="http://schemas.openxmlformats.org/officeDocument/2006/relationships" xmlns:a="http://schemas.openxmlformats.org/drawingml/2006/main" r:embed="R3d12f3f6bf324ed2">
+          <a:blip xmlns:r="http://schemas.openxmlformats.org/officeDocument/2006/relationships" xmlns:a="http://schemas.openxmlformats.org/drawingml/2006/main" r:embed="Rbb3ebe62c07b4d81">
             <a:alphaModFix amt="28000"/>
           </a:blip>
           <a:stretch xmlns:a="http://schemas.openxmlformats.org/drawingml/2006/main"/>
@@ -3982,17 +3982,17 @@
   </p:cSld>
   <p:clrMap bg1="lt1" tx1="dk1" bg2="lt2" tx2="dk2" accent1="accent1" accent2="accent2" accent3="accent3" accent4="accent4" accent5="accent5" accent6="accent6" hlink="hlink" folHlink="folHlink"/>
   <p:sldLayoutIdLst>
-    <p:sldLayoutId xmlns:r="http://schemas.openxmlformats.org/officeDocument/2006/relationships" id="2147483649" r:id="R5aa963b0d75740e2"/>
-    <p:sldLayoutId xmlns:r="http://schemas.openxmlformats.org/officeDocument/2006/relationships" id="2147483650" r:id="Rbcfe961c85aa4b18"/>
-    <p:sldLayoutId xmlns:r="http://schemas.openxmlformats.org/officeDocument/2006/relationships" id="2147483651" r:id="Ra03fd748ac0e412d"/>
-    <p:sldLayoutId xmlns:r="http://schemas.openxmlformats.org/officeDocument/2006/relationships" id="2147483652" r:id="R0a92e29854d445b1"/>
-    <p:sldLayoutId xmlns:r="http://schemas.openxmlformats.org/officeDocument/2006/relationships" id="2147483653" r:id="Rbc2321cd2e454c62"/>
-    <p:sldLayoutId xmlns:r="http://schemas.openxmlformats.org/officeDocument/2006/relationships" id="2147483654" r:id="Rb065bfad47be41a5"/>
-    <p:sldLayoutId xmlns:r="http://schemas.openxmlformats.org/officeDocument/2006/relationships" id="2147483655" r:id="R7a848a3353894650"/>
-    <p:sldLayoutId xmlns:r="http://schemas.openxmlformats.org/officeDocument/2006/relationships" id="2147483656" r:id="R6530db7750f04ace"/>
-    <p:sldLayoutId xmlns:r="http://schemas.openxmlformats.org/officeDocument/2006/relationships" id="2147483657" r:id="R577fd149ac044e75"/>
-    <p:sldLayoutId xmlns:r="http://schemas.openxmlformats.org/officeDocument/2006/relationships" id="2147483658" r:id="Rb44496fda864457a"/>
-    <p:sldLayoutId xmlns:r="http://schemas.openxmlformats.org/officeDocument/2006/relationships" id="2147483659" r:id="Radafdf32ddbe4c5f"/>
+    <p:sldLayoutId xmlns:r="http://schemas.openxmlformats.org/officeDocument/2006/relationships" id="2147483649" r:id="Re3c18bc04c074e5c"/>
+    <p:sldLayoutId xmlns:r="http://schemas.openxmlformats.org/officeDocument/2006/relationships" id="2147483650" r:id="Rc3fa4ebf12d94b3c"/>
+    <p:sldLayoutId xmlns:r="http://schemas.openxmlformats.org/officeDocument/2006/relationships" id="2147483651" r:id="Re8d1afb1dde54ed2"/>
+    <p:sldLayoutId xmlns:r="http://schemas.openxmlformats.org/officeDocument/2006/relationships" id="2147483652" r:id="Rf4e9716b2d19454f"/>
+    <p:sldLayoutId xmlns:r="http://schemas.openxmlformats.org/officeDocument/2006/relationships" id="2147483653" r:id="R6f0c1c4fbc704560"/>
+    <p:sldLayoutId xmlns:r="http://schemas.openxmlformats.org/officeDocument/2006/relationships" id="2147483654" r:id="R4d340649e47843ae"/>
+    <p:sldLayoutId xmlns:r="http://schemas.openxmlformats.org/officeDocument/2006/relationships" id="2147483655" r:id="R12c1c8f835374108"/>
+    <p:sldLayoutId xmlns:r="http://schemas.openxmlformats.org/officeDocument/2006/relationships" id="2147483656" r:id="Ra9d715cc6bb64ad5"/>
+    <p:sldLayoutId xmlns:r="http://schemas.openxmlformats.org/officeDocument/2006/relationships" id="2147483657" r:id="R7729be4791a24468"/>
+    <p:sldLayoutId xmlns:r="http://schemas.openxmlformats.org/officeDocument/2006/relationships" id="2147483658" r:id="R04f198d20e564834"/>
+    <p:sldLayoutId xmlns:r="http://schemas.openxmlformats.org/officeDocument/2006/relationships" id="2147483659" r:id="R75404eac4851422e"/>
   </p:sldLayoutIdLst>
   <p:hf hdr="0" ftr="0" dt="0"/>
   <p:txStyles>

--- a/Mapped Curriculum Lessons/Grade 7/Lesson 24 - Deleting by List Position/Deleting by List Position - Slides.pptx
+++ b/Mapped Curriculum Lessons/Grade 7/Lesson 24 - Deleting by List Position/Deleting by List Position - Slides.pptx
@@ -2,28 +2,28 @@
 <file path=ppt/presentation.xml><?xml version="1.0" encoding="utf-8"?>
 <p:presentation xmlns:p="http://schemas.openxmlformats.org/presentationml/2006/main" embedTrueTypeFonts="1" saveSubsetFonts="0">
   <p:sldMasterIdLst>
-    <p:sldMasterId xmlns:r="http://schemas.openxmlformats.org/officeDocument/2006/relationships" id="2147483648" r:id="Rb47582a31cc145f1"/>
+    <p:sldMasterId xmlns:r="http://schemas.openxmlformats.org/officeDocument/2006/relationships" id="2147483648" r:id="Rf7f99efa4db149bb"/>
   </p:sldMasterIdLst>
   <p:notesMasterIdLst>
-    <p:notesMasterId xmlns:r="http://schemas.openxmlformats.org/officeDocument/2006/relationships" r:id="Rdf71844978c646fa"/>
+    <p:notesMasterId xmlns:r="http://schemas.openxmlformats.org/officeDocument/2006/relationships" r:id="R61fcd32897904631"/>
   </p:notesMasterIdLst>
   <p:sldIdLst>
-    <p:sldId xmlns:r="http://schemas.openxmlformats.org/officeDocument/2006/relationships" id="256" r:id="R60be6a0aae3f4613"/>
-    <p:sldId xmlns:r="http://schemas.openxmlformats.org/officeDocument/2006/relationships" id="257" r:id="R96df0160591e474d"/>
-    <p:sldId xmlns:r="http://schemas.openxmlformats.org/officeDocument/2006/relationships" id="258" r:id="Reaa472601858401e"/>
-    <p:sldId xmlns:r="http://schemas.openxmlformats.org/officeDocument/2006/relationships" id="259" r:id="Ra154fa8910cd4ac1"/>
-    <p:sldId xmlns:r="http://schemas.openxmlformats.org/officeDocument/2006/relationships" id="260" r:id="R70f4673b59f2448e"/>
-    <p:sldId xmlns:r="http://schemas.openxmlformats.org/officeDocument/2006/relationships" id="261" r:id="R9cbb72484cc64f6e"/>
-    <p:sldId xmlns:r="http://schemas.openxmlformats.org/officeDocument/2006/relationships" id="262" r:id="Rb78c2e7a25f24ccf"/>
-    <p:sldId xmlns:r="http://schemas.openxmlformats.org/officeDocument/2006/relationships" id="263" r:id="Rddea5f391a714130"/>
-    <p:sldId xmlns:r="http://schemas.openxmlformats.org/officeDocument/2006/relationships" id="264" r:id="Ref82f4c8482f466a"/>
+    <p:sldId xmlns:r="http://schemas.openxmlformats.org/officeDocument/2006/relationships" id="256" r:id="Rdd383876ad524a7f"/>
+    <p:sldId xmlns:r="http://schemas.openxmlformats.org/officeDocument/2006/relationships" id="257" r:id="R23718ed2446446ba"/>
+    <p:sldId xmlns:r="http://schemas.openxmlformats.org/officeDocument/2006/relationships" id="258" r:id="R8e462275ba2c4b3e"/>
+    <p:sldId xmlns:r="http://schemas.openxmlformats.org/officeDocument/2006/relationships" id="259" r:id="R3f501080122b4c44"/>
+    <p:sldId xmlns:r="http://schemas.openxmlformats.org/officeDocument/2006/relationships" id="260" r:id="R86cac1a33b3549d3"/>
+    <p:sldId xmlns:r="http://schemas.openxmlformats.org/officeDocument/2006/relationships" id="261" r:id="R51b9c3a436474500"/>
+    <p:sldId xmlns:r="http://schemas.openxmlformats.org/officeDocument/2006/relationships" id="262" r:id="R3f8f2601e2b94d0d"/>
+    <p:sldId xmlns:r="http://schemas.openxmlformats.org/officeDocument/2006/relationships" id="263" r:id="R384364d1a05844f5"/>
+    <p:sldId xmlns:r="http://schemas.openxmlformats.org/officeDocument/2006/relationships" id="264" r:id="R4f53aaa5f6454002"/>
   </p:sldIdLst>
   <p:sldSz cx="12192000" cy="6858000"/>
   <p:notesSz cx="6858000" cy="9144000"/>
   <p:embeddedFontLst>
     <p:embeddedFont>
       <p:font typeface="JetBrains Mono"/>
-      <p:regular xmlns:r="http://schemas.openxmlformats.org/officeDocument/2006/relationships" r:id="R6b06db2bddd74b19"/>
+      <p:regular xmlns:r="http://schemas.openxmlformats.org/officeDocument/2006/relationships" r:id="Rccdf67ef382b4201"/>
     </p:embeddedFont>
   </p:embeddedFontLst>
 </p:presentation>
@@ -1071,7 +1071,7 @@
           <p:nvPr/>
         </p:nvPicPr>
         <p:blipFill rotWithShape="1">
-          <a:blip xmlns:r="http://schemas.openxmlformats.org/officeDocument/2006/relationships" xmlns:a="http://schemas.openxmlformats.org/drawingml/2006/main" r:embed="R608d68928cc24582"/>
+          <a:blip xmlns:r="http://schemas.openxmlformats.org/officeDocument/2006/relationships" xmlns:a="http://schemas.openxmlformats.org/drawingml/2006/main" r:embed="Rb968661d8dac4413"/>
           <a:stretch xmlns:a="http://schemas.openxmlformats.org/drawingml/2006/main"/>
         </p:blipFill>
         <p:spPr>
@@ -1451,7 +1451,7 @@
           <p:nvPr/>
         </p:nvPicPr>
         <p:blipFill rotWithShape="1">
-          <a:blip xmlns:r="http://schemas.openxmlformats.org/officeDocument/2006/relationships" xmlns:a="http://schemas.openxmlformats.org/drawingml/2006/main" r:embed="R0056fc07722b42a5">
+          <a:blip xmlns:r="http://schemas.openxmlformats.org/officeDocument/2006/relationships" xmlns:a="http://schemas.openxmlformats.org/drawingml/2006/main" r:embed="R70f9cccd693c4388">
             <a:alphaModFix amt="28000"/>
           </a:blip>
           <a:stretch xmlns:a="http://schemas.openxmlformats.org/drawingml/2006/main"/>
@@ -1664,7 +1664,7 @@
           <p:nvPr/>
         </p:nvPicPr>
         <p:blipFill rotWithShape="1">
-          <a:blip xmlns:r="http://schemas.openxmlformats.org/officeDocument/2006/relationships" xmlns:a="http://schemas.openxmlformats.org/drawingml/2006/main" r:embed="R82f5e9eb9d294834">
+          <a:blip xmlns:r="http://schemas.openxmlformats.org/officeDocument/2006/relationships" xmlns:a="http://schemas.openxmlformats.org/drawingml/2006/main" r:embed="R5fc49ea921c94703">
             <a:alphaModFix amt="28000"/>
           </a:blip>
           <a:stretch xmlns:a="http://schemas.openxmlformats.org/drawingml/2006/main"/>
@@ -1899,7 +1899,7 @@
           <p:nvPr/>
         </p:nvPicPr>
         <p:blipFill rotWithShape="1">
-          <a:blip xmlns:r="http://schemas.openxmlformats.org/officeDocument/2006/relationships" xmlns:a="http://schemas.openxmlformats.org/drawingml/2006/main" r:embed="R28a6e728eb6f46ce">
+          <a:blip xmlns:r="http://schemas.openxmlformats.org/officeDocument/2006/relationships" xmlns:a="http://schemas.openxmlformats.org/drawingml/2006/main" r:embed="R75aafe8c426f43fe">
             <a:alphaModFix amt="28000"/>
           </a:blip>
           <a:stretch xmlns:a="http://schemas.openxmlformats.org/drawingml/2006/main"/>
@@ -2176,7 +2176,7 @@
           <p:nvPr/>
         </p:nvPicPr>
         <p:blipFill rotWithShape="1">
-          <a:blip xmlns:r="http://schemas.openxmlformats.org/officeDocument/2006/relationships" xmlns:a="http://schemas.openxmlformats.org/drawingml/2006/main" r:embed="R49938f9b83494795">
+          <a:blip xmlns:r="http://schemas.openxmlformats.org/officeDocument/2006/relationships" xmlns:a="http://schemas.openxmlformats.org/drawingml/2006/main" r:embed="Rd58e6dbf699848db">
             <a:alphaModFix amt="28000"/>
           </a:blip>
           <a:stretch xmlns:a="http://schemas.openxmlformats.org/drawingml/2006/main"/>
@@ -2451,7 +2451,7 @@
           <p:nvPr/>
         </p:nvPicPr>
         <p:blipFill rotWithShape="1">
-          <a:blip xmlns:r="http://schemas.openxmlformats.org/officeDocument/2006/relationships" xmlns:a="http://schemas.openxmlformats.org/drawingml/2006/main" r:embed="Rd2cfd52b8e6d4623">
+          <a:blip xmlns:r="http://schemas.openxmlformats.org/officeDocument/2006/relationships" xmlns:a="http://schemas.openxmlformats.org/drawingml/2006/main" r:embed="R03fb68b298da45fe">
             <a:alphaModFix amt="28000"/>
           </a:blip>
           <a:stretch xmlns:a="http://schemas.openxmlformats.org/drawingml/2006/main"/>
@@ -2875,7 +2875,7 @@
           <p:nvPr/>
         </p:nvPicPr>
         <p:blipFill rotWithShape="1">
-          <a:blip xmlns:r="http://schemas.openxmlformats.org/officeDocument/2006/relationships" xmlns:a="http://schemas.openxmlformats.org/drawingml/2006/main" r:embed="Rb3e2fed5dba045f9">
+          <a:blip xmlns:r="http://schemas.openxmlformats.org/officeDocument/2006/relationships" xmlns:a="http://schemas.openxmlformats.org/drawingml/2006/main" r:embed="Re2e76093acde4a54">
             <a:alphaModFix amt="28000"/>
           </a:blip>
           <a:stretch xmlns:a="http://schemas.openxmlformats.org/drawingml/2006/main"/>
@@ -3016,7 +3016,7 @@
           <p:nvPr/>
         </p:nvPicPr>
         <p:blipFill rotWithShape="1">
-          <a:blip xmlns:r="http://schemas.openxmlformats.org/officeDocument/2006/relationships" xmlns:a="http://schemas.openxmlformats.org/drawingml/2006/main" r:embed="Rad138b4a12814820">
+          <a:blip xmlns:r="http://schemas.openxmlformats.org/officeDocument/2006/relationships" xmlns:a="http://schemas.openxmlformats.org/drawingml/2006/main" r:embed="Rae7c144ef23f4be1">
             <a:alphaModFix amt="28000"/>
           </a:blip>
           <a:stretch xmlns:a="http://schemas.openxmlformats.org/drawingml/2006/main"/>
@@ -3130,7 +3130,7 @@
           <p:nvPr/>
         </p:nvPicPr>
         <p:blipFill rotWithShape="1">
-          <a:blip xmlns:r="http://schemas.openxmlformats.org/officeDocument/2006/relationships" xmlns:a="http://schemas.openxmlformats.org/drawingml/2006/main" r:embed="R106385213c174224">
+          <a:blip xmlns:r="http://schemas.openxmlformats.org/officeDocument/2006/relationships" xmlns:a="http://schemas.openxmlformats.org/drawingml/2006/main" r:embed="R7e50d0a4b73e43de">
             <a:alphaModFix amt="28000"/>
           </a:blip>
           <a:stretch xmlns:a="http://schemas.openxmlformats.org/drawingml/2006/main"/>
@@ -3457,7 +3457,7 @@
           <p:nvPr/>
         </p:nvPicPr>
         <p:blipFill rotWithShape="1">
-          <a:blip xmlns:r="http://schemas.openxmlformats.org/officeDocument/2006/relationships" xmlns:a="http://schemas.openxmlformats.org/drawingml/2006/main" r:embed="R20e1bfbf90314c5f">
+          <a:blip xmlns:r="http://schemas.openxmlformats.org/officeDocument/2006/relationships" xmlns:a="http://schemas.openxmlformats.org/drawingml/2006/main" r:embed="R78c724f58f574ab5">
             <a:alphaModFix amt="28000"/>
           </a:blip>
           <a:stretch xmlns:a="http://schemas.openxmlformats.org/drawingml/2006/main"/>
@@ -3745,7 +3745,7 @@
           <p:nvPr/>
         </p:nvPicPr>
         <p:blipFill rotWithShape="1">
-          <a:blip xmlns:r="http://schemas.openxmlformats.org/officeDocument/2006/relationships" xmlns:a="http://schemas.openxmlformats.org/drawingml/2006/main" r:embed="Rbb3ebe62c07b4d81">
+          <a:blip xmlns:r="http://schemas.openxmlformats.org/officeDocument/2006/relationships" xmlns:a="http://schemas.openxmlformats.org/drawingml/2006/main" r:embed="Rf5b3b38ef3fb479a">
             <a:alphaModFix amt="28000"/>
           </a:blip>
           <a:stretch xmlns:a="http://schemas.openxmlformats.org/drawingml/2006/main"/>
@@ -3982,17 +3982,17 @@
   </p:cSld>
   <p:clrMap bg1="lt1" tx1="dk1" bg2="lt2" tx2="dk2" accent1="accent1" accent2="accent2" accent3="accent3" accent4="accent4" accent5="accent5" accent6="accent6" hlink="hlink" folHlink="folHlink"/>
   <p:sldLayoutIdLst>
-    <p:sldLayoutId xmlns:r="http://schemas.openxmlformats.org/officeDocument/2006/relationships" id="2147483649" r:id="Re3c18bc04c074e5c"/>
-    <p:sldLayoutId xmlns:r="http://schemas.openxmlformats.org/officeDocument/2006/relationships" id="2147483650" r:id="Rc3fa4ebf12d94b3c"/>
-    <p:sldLayoutId xmlns:r="http://schemas.openxmlformats.org/officeDocument/2006/relationships" id="2147483651" r:id="Re8d1afb1dde54ed2"/>
-    <p:sldLayoutId xmlns:r="http://schemas.openxmlformats.org/officeDocument/2006/relationships" id="2147483652" r:id="Rf4e9716b2d19454f"/>
-    <p:sldLayoutId xmlns:r="http://schemas.openxmlformats.org/officeDocument/2006/relationships" id="2147483653" r:id="R6f0c1c4fbc704560"/>
-    <p:sldLayoutId xmlns:r="http://schemas.openxmlformats.org/officeDocument/2006/relationships" id="2147483654" r:id="R4d340649e47843ae"/>
-    <p:sldLayoutId xmlns:r="http://schemas.openxmlformats.org/officeDocument/2006/relationships" id="2147483655" r:id="R12c1c8f835374108"/>
-    <p:sldLayoutId xmlns:r="http://schemas.openxmlformats.org/officeDocument/2006/relationships" id="2147483656" r:id="Ra9d715cc6bb64ad5"/>
-    <p:sldLayoutId xmlns:r="http://schemas.openxmlformats.org/officeDocument/2006/relationships" id="2147483657" r:id="R7729be4791a24468"/>
-    <p:sldLayoutId xmlns:r="http://schemas.openxmlformats.org/officeDocument/2006/relationships" id="2147483658" r:id="R04f198d20e564834"/>
-    <p:sldLayoutId xmlns:r="http://schemas.openxmlformats.org/officeDocument/2006/relationships" id="2147483659" r:id="R75404eac4851422e"/>
+    <p:sldLayoutId xmlns:r="http://schemas.openxmlformats.org/officeDocument/2006/relationships" id="2147483649" r:id="Rb729aef4bf814a7c"/>
+    <p:sldLayoutId xmlns:r="http://schemas.openxmlformats.org/officeDocument/2006/relationships" id="2147483650" r:id="R3450817dfbb74ebb"/>
+    <p:sldLayoutId xmlns:r="http://schemas.openxmlformats.org/officeDocument/2006/relationships" id="2147483651" r:id="R2b9da8c28d4148f5"/>
+    <p:sldLayoutId xmlns:r="http://schemas.openxmlformats.org/officeDocument/2006/relationships" id="2147483652" r:id="Rdb18bf000bb84b09"/>
+    <p:sldLayoutId xmlns:r="http://schemas.openxmlformats.org/officeDocument/2006/relationships" id="2147483653" r:id="Rbfe3c060faf440ae"/>
+    <p:sldLayoutId xmlns:r="http://schemas.openxmlformats.org/officeDocument/2006/relationships" id="2147483654" r:id="Raf76490fabe34775"/>
+    <p:sldLayoutId xmlns:r="http://schemas.openxmlformats.org/officeDocument/2006/relationships" id="2147483655" r:id="Rd48100419c4e41cd"/>
+    <p:sldLayoutId xmlns:r="http://schemas.openxmlformats.org/officeDocument/2006/relationships" id="2147483656" r:id="R37d6cd4a83184265"/>
+    <p:sldLayoutId xmlns:r="http://schemas.openxmlformats.org/officeDocument/2006/relationships" id="2147483657" r:id="R667701c88e2f4ceb"/>
+    <p:sldLayoutId xmlns:r="http://schemas.openxmlformats.org/officeDocument/2006/relationships" id="2147483658" r:id="R9d8141686b8945ef"/>
+    <p:sldLayoutId xmlns:r="http://schemas.openxmlformats.org/officeDocument/2006/relationships" id="2147483659" r:id="Rca368ad8d12a4b55"/>
   </p:sldLayoutIdLst>
   <p:hf hdr="0" ftr="0" dt="0"/>
   <p:txStyles>

--- a/Mapped Curriculum Lessons/Grade 7/Lesson 24 - Deleting by List Position/Deleting by List Position - Slides.pptx
+++ b/Mapped Curriculum Lessons/Grade 7/Lesson 24 - Deleting by List Position/Deleting by List Position - Slides.pptx
@@ -2,28 +2,28 @@
 <file path=ppt/presentation.xml><?xml version="1.0" encoding="utf-8"?>
 <p:presentation xmlns:p="http://schemas.openxmlformats.org/presentationml/2006/main" embedTrueTypeFonts="1" saveSubsetFonts="0">
   <p:sldMasterIdLst>
-    <p:sldMasterId xmlns:r="http://schemas.openxmlformats.org/officeDocument/2006/relationships" id="2147483648" r:id="Rf7f99efa4db149bb"/>
+    <p:sldMasterId xmlns:r="http://schemas.openxmlformats.org/officeDocument/2006/relationships" id="2147483648" r:id="R948e42dbc9404f18"/>
   </p:sldMasterIdLst>
   <p:notesMasterIdLst>
-    <p:notesMasterId xmlns:r="http://schemas.openxmlformats.org/officeDocument/2006/relationships" r:id="R61fcd32897904631"/>
+    <p:notesMasterId xmlns:r="http://schemas.openxmlformats.org/officeDocument/2006/relationships" r:id="Rc98e66af5bf54d81"/>
   </p:notesMasterIdLst>
   <p:sldIdLst>
-    <p:sldId xmlns:r="http://schemas.openxmlformats.org/officeDocument/2006/relationships" id="256" r:id="Rdd383876ad524a7f"/>
-    <p:sldId xmlns:r="http://schemas.openxmlformats.org/officeDocument/2006/relationships" id="257" r:id="R23718ed2446446ba"/>
-    <p:sldId xmlns:r="http://schemas.openxmlformats.org/officeDocument/2006/relationships" id="258" r:id="R8e462275ba2c4b3e"/>
-    <p:sldId xmlns:r="http://schemas.openxmlformats.org/officeDocument/2006/relationships" id="259" r:id="R3f501080122b4c44"/>
-    <p:sldId xmlns:r="http://schemas.openxmlformats.org/officeDocument/2006/relationships" id="260" r:id="R86cac1a33b3549d3"/>
-    <p:sldId xmlns:r="http://schemas.openxmlformats.org/officeDocument/2006/relationships" id="261" r:id="R51b9c3a436474500"/>
-    <p:sldId xmlns:r="http://schemas.openxmlformats.org/officeDocument/2006/relationships" id="262" r:id="R3f8f2601e2b94d0d"/>
-    <p:sldId xmlns:r="http://schemas.openxmlformats.org/officeDocument/2006/relationships" id="263" r:id="R384364d1a05844f5"/>
-    <p:sldId xmlns:r="http://schemas.openxmlformats.org/officeDocument/2006/relationships" id="264" r:id="R4f53aaa5f6454002"/>
+    <p:sldId xmlns:r="http://schemas.openxmlformats.org/officeDocument/2006/relationships" id="256" r:id="Rf246bc636f5b403d"/>
+    <p:sldId xmlns:r="http://schemas.openxmlformats.org/officeDocument/2006/relationships" id="257" r:id="Rf192acd722b348a8"/>
+    <p:sldId xmlns:r="http://schemas.openxmlformats.org/officeDocument/2006/relationships" id="258" r:id="R0b707387ff634492"/>
+    <p:sldId xmlns:r="http://schemas.openxmlformats.org/officeDocument/2006/relationships" id="259" r:id="Rff9c5052758d4671"/>
+    <p:sldId xmlns:r="http://schemas.openxmlformats.org/officeDocument/2006/relationships" id="260" r:id="R7f25b5b4ff284e1a"/>
+    <p:sldId xmlns:r="http://schemas.openxmlformats.org/officeDocument/2006/relationships" id="261" r:id="Rb137593157a54e51"/>
+    <p:sldId xmlns:r="http://schemas.openxmlformats.org/officeDocument/2006/relationships" id="262" r:id="Rc82a28600be64f3b"/>
+    <p:sldId xmlns:r="http://schemas.openxmlformats.org/officeDocument/2006/relationships" id="263" r:id="Rd51d4e62dcc046a3"/>
+    <p:sldId xmlns:r="http://schemas.openxmlformats.org/officeDocument/2006/relationships" id="264" r:id="R20fff6d6e68a41a8"/>
   </p:sldIdLst>
   <p:sldSz cx="12192000" cy="6858000"/>
   <p:notesSz cx="6858000" cy="9144000"/>
   <p:embeddedFontLst>
     <p:embeddedFont>
       <p:font typeface="JetBrains Mono"/>
-      <p:regular xmlns:r="http://schemas.openxmlformats.org/officeDocument/2006/relationships" r:id="Rccdf67ef382b4201"/>
+      <p:regular xmlns:r="http://schemas.openxmlformats.org/officeDocument/2006/relationships" r:id="R60c47af91b194f6e"/>
     </p:embeddedFont>
   </p:embeddedFontLst>
 </p:presentation>
@@ -1071,7 +1071,7 @@
           <p:nvPr/>
         </p:nvPicPr>
         <p:blipFill rotWithShape="1">
-          <a:blip xmlns:r="http://schemas.openxmlformats.org/officeDocument/2006/relationships" xmlns:a="http://schemas.openxmlformats.org/drawingml/2006/main" r:embed="Rb968661d8dac4413"/>
+          <a:blip xmlns:r="http://schemas.openxmlformats.org/officeDocument/2006/relationships" xmlns:a="http://schemas.openxmlformats.org/drawingml/2006/main" r:embed="Recb02c87eb3f455e"/>
           <a:stretch xmlns:a="http://schemas.openxmlformats.org/drawingml/2006/main"/>
         </p:blipFill>
         <p:spPr>
@@ -1451,7 +1451,7 @@
           <p:nvPr/>
         </p:nvPicPr>
         <p:blipFill rotWithShape="1">
-          <a:blip xmlns:r="http://schemas.openxmlformats.org/officeDocument/2006/relationships" xmlns:a="http://schemas.openxmlformats.org/drawingml/2006/main" r:embed="R70f9cccd693c4388">
+          <a:blip xmlns:r="http://schemas.openxmlformats.org/officeDocument/2006/relationships" xmlns:a="http://schemas.openxmlformats.org/drawingml/2006/main" r:embed="Rafeb749a20ba447c">
             <a:alphaModFix amt="28000"/>
           </a:blip>
           <a:stretch xmlns:a="http://schemas.openxmlformats.org/drawingml/2006/main"/>
@@ -1664,7 +1664,7 @@
           <p:nvPr/>
         </p:nvPicPr>
         <p:blipFill rotWithShape="1">
-          <a:blip xmlns:r="http://schemas.openxmlformats.org/officeDocument/2006/relationships" xmlns:a="http://schemas.openxmlformats.org/drawingml/2006/main" r:embed="R5fc49ea921c94703">
+          <a:blip xmlns:r="http://schemas.openxmlformats.org/officeDocument/2006/relationships" xmlns:a="http://schemas.openxmlformats.org/drawingml/2006/main" r:embed="Ra3b3455c93d74c5d">
             <a:alphaModFix amt="28000"/>
           </a:blip>
           <a:stretch xmlns:a="http://schemas.openxmlformats.org/drawingml/2006/main"/>
@@ -1899,7 +1899,7 @@
           <p:nvPr/>
         </p:nvPicPr>
         <p:blipFill rotWithShape="1">
-          <a:blip xmlns:r="http://schemas.openxmlformats.org/officeDocument/2006/relationships" xmlns:a="http://schemas.openxmlformats.org/drawingml/2006/main" r:embed="R75aafe8c426f43fe">
+          <a:blip xmlns:r="http://schemas.openxmlformats.org/officeDocument/2006/relationships" xmlns:a="http://schemas.openxmlformats.org/drawingml/2006/main" r:embed="R02178aa045e74e11">
             <a:alphaModFix amt="28000"/>
           </a:blip>
           <a:stretch xmlns:a="http://schemas.openxmlformats.org/drawingml/2006/main"/>
@@ -2176,7 +2176,7 @@
           <p:nvPr/>
         </p:nvPicPr>
         <p:blipFill rotWithShape="1">
-          <a:blip xmlns:r="http://schemas.openxmlformats.org/officeDocument/2006/relationships" xmlns:a="http://schemas.openxmlformats.org/drawingml/2006/main" r:embed="Rd58e6dbf699848db">
+          <a:blip xmlns:r="http://schemas.openxmlformats.org/officeDocument/2006/relationships" xmlns:a="http://schemas.openxmlformats.org/drawingml/2006/main" r:embed="R9b1509ae07ff4141">
             <a:alphaModFix amt="28000"/>
           </a:blip>
           <a:stretch xmlns:a="http://schemas.openxmlformats.org/drawingml/2006/main"/>
@@ -2451,7 +2451,7 @@
           <p:nvPr/>
         </p:nvPicPr>
         <p:blipFill rotWithShape="1">
-          <a:blip xmlns:r="http://schemas.openxmlformats.org/officeDocument/2006/relationships" xmlns:a="http://schemas.openxmlformats.org/drawingml/2006/main" r:embed="R03fb68b298da45fe">
+          <a:blip xmlns:r="http://schemas.openxmlformats.org/officeDocument/2006/relationships" xmlns:a="http://schemas.openxmlformats.org/drawingml/2006/main" r:embed="R05173f3f3d3f490c">
             <a:alphaModFix amt="28000"/>
           </a:blip>
           <a:stretch xmlns:a="http://schemas.openxmlformats.org/drawingml/2006/main"/>
@@ -2875,7 +2875,7 @@
           <p:nvPr/>
         </p:nvPicPr>
         <p:blipFill rotWithShape="1">
-          <a:blip xmlns:r="http://schemas.openxmlformats.org/officeDocument/2006/relationships" xmlns:a="http://schemas.openxmlformats.org/drawingml/2006/main" r:embed="Re2e76093acde4a54">
+          <a:blip xmlns:r="http://schemas.openxmlformats.org/officeDocument/2006/relationships" xmlns:a="http://schemas.openxmlformats.org/drawingml/2006/main" r:embed="R5ff1095fa7da4bad">
             <a:alphaModFix amt="28000"/>
           </a:blip>
           <a:stretch xmlns:a="http://schemas.openxmlformats.org/drawingml/2006/main"/>
@@ -3016,7 +3016,7 @@
           <p:nvPr/>
         </p:nvPicPr>
         <p:blipFill rotWithShape="1">
-          <a:blip xmlns:r="http://schemas.openxmlformats.org/officeDocument/2006/relationships" xmlns:a="http://schemas.openxmlformats.org/drawingml/2006/main" r:embed="Rae7c144ef23f4be1">
+          <a:blip xmlns:r="http://schemas.openxmlformats.org/officeDocument/2006/relationships" xmlns:a="http://schemas.openxmlformats.org/drawingml/2006/main" r:embed="R9149645c6eea4801">
             <a:alphaModFix amt="28000"/>
           </a:blip>
           <a:stretch xmlns:a="http://schemas.openxmlformats.org/drawingml/2006/main"/>
@@ -3130,7 +3130,7 @@
           <p:nvPr/>
         </p:nvPicPr>
         <p:blipFill rotWithShape="1">
-          <a:blip xmlns:r="http://schemas.openxmlformats.org/officeDocument/2006/relationships" xmlns:a="http://schemas.openxmlformats.org/drawingml/2006/main" r:embed="R7e50d0a4b73e43de">
+          <a:blip xmlns:r="http://schemas.openxmlformats.org/officeDocument/2006/relationships" xmlns:a="http://schemas.openxmlformats.org/drawingml/2006/main" r:embed="R42833555a8674413">
             <a:alphaModFix amt="28000"/>
           </a:blip>
           <a:stretch xmlns:a="http://schemas.openxmlformats.org/drawingml/2006/main"/>
@@ -3457,7 +3457,7 @@
           <p:nvPr/>
         </p:nvPicPr>
         <p:blipFill rotWithShape="1">
-          <a:blip xmlns:r="http://schemas.openxmlformats.org/officeDocument/2006/relationships" xmlns:a="http://schemas.openxmlformats.org/drawingml/2006/main" r:embed="R78c724f58f574ab5">
+          <a:blip xmlns:r="http://schemas.openxmlformats.org/officeDocument/2006/relationships" xmlns:a="http://schemas.openxmlformats.org/drawingml/2006/main" r:embed="R0c84cb6f90d14f36">
             <a:alphaModFix amt="28000"/>
           </a:blip>
           <a:stretch xmlns:a="http://schemas.openxmlformats.org/drawingml/2006/main"/>
@@ -3745,7 +3745,7 @@
           <p:nvPr/>
         </p:nvPicPr>
         <p:blipFill rotWithShape="1">
-          <a:blip xmlns:r="http://schemas.openxmlformats.org/officeDocument/2006/relationships" xmlns:a="http://schemas.openxmlformats.org/drawingml/2006/main" r:embed="Rf5b3b38ef3fb479a">
+          <a:blip xmlns:r="http://schemas.openxmlformats.org/officeDocument/2006/relationships" xmlns:a="http://schemas.openxmlformats.org/drawingml/2006/main" r:embed="R3935c4b319e64aaa">
             <a:alphaModFix amt="28000"/>
           </a:blip>
           <a:stretch xmlns:a="http://schemas.openxmlformats.org/drawingml/2006/main"/>
@@ -3982,17 +3982,17 @@
   </p:cSld>
   <p:clrMap bg1="lt1" tx1="dk1" bg2="lt2" tx2="dk2" accent1="accent1" accent2="accent2" accent3="accent3" accent4="accent4" accent5="accent5" accent6="accent6" hlink="hlink" folHlink="folHlink"/>
   <p:sldLayoutIdLst>
-    <p:sldLayoutId xmlns:r="http://schemas.openxmlformats.org/officeDocument/2006/relationships" id="2147483649" r:id="Rb729aef4bf814a7c"/>
-    <p:sldLayoutId xmlns:r="http://schemas.openxmlformats.org/officeDocument/2006/relationships" id="2147483650" r:id="R3450817dfbb74ebb"/>
-    <p:sldLayoutId xmlns:r="http://schemas.openxmlformats.org/officeDocument/2006/relationships" id="2147483651" r:id="R2b9da8c28d4148f5"/>
-    <p:sldLayoutId xmlns:r="http://schemas.openxmlformats.org/officeDocument/2006/relationships" id="2147483652" r:id="Rdb18bf000bb84b09"/>
-    <p:sldLayoutId xmlns:r="http://schemas.openxmlformats.org/officeDocument/2006/relationships" id="2147483653" r:id="Rbfe3c060faf440ae"/>
-    <p:sldLayoutId xmlns:r="http://schemas.openxmlformats.org/officeDocument/2006/relationships" id="2147483654" r:id="Raf76490fabe34775"/>
-    <p:sldLayoutId xmlns:r="http://schemas.openxmlformats.org/officeDocument/2006/relationships" id="2147483655" r:id="Rd48100419c4e41cd"/>
-    <p:sldLayoutId xmlns:r="http://schemas.openxmlformats.org/officeDocument/2006/relationships" id="2147483656" r:id="R37d6cd4a83184265"/>
-    <p:sldLayoutId xmlns:r="http://schemas.openxmlformats.org/officeDocument/2006/relationships" id="2147483657" r:id="R667701c88e2f4ceb"/>
-    <p:sldLayoutId xmlns:r="http://schemas.openxmlformats.org/officeDocument/2006/relationships" id="2147483658" r:id="R9d8141686b8945ef"/>
-    <p:sldLayoutId xmlns:r="http://schemas.openxmlformats.org/officeDocument/2006/relationships" id="2147483659" r:id="Rca368ad8d12a4b55"/>
+    <p:sldLayoutId xmlns:r="http://schemas.openxmlformats.org/officeDocument/2006/relationships" id="2147483649" r:id="Rced16463a7c54c22"/>
+    <p:sldLayoutId xmlns:r="http://schemas.openxmlformats.org/officeDocument/2006/relationships" id="2147483650" r:id="Rb33d5f44946a4688"/>
+    <p:sldLayoutId xmlns:r="http://schemas.openxmlformats.org/officeDocument/2006/relationships" id="2147483651" r:id="Rf476340fd2414d36"/>
+    <p:sldLayoutId xmlns:r="http://schemas.openxmlformats.org/officeDocument/2006/relationships" id="2147483652" r:id="Re42199f5ee7a4b34"/>
+    <p:sldLayoutId xmlns:r="http://schemas.openxmlformats.org/officeDocument/2006/relationships" id="2147483653" r:id="R371ba16042c54f7e"/>
+    <p:sldLayoutId xmlns:r="http://schemas.openxmlformats.org/officeDocument/2006/relationships" id="2147483654" r:id="R9518508711b6408d"/>
+    <p:sldLayoutId xmlns:r="http://schemas.openxmlformats.org/officeDocument/2006/relationships" id="2147483655" r:id="R2b3c2365a3a54ded"/>
+    <p:sldLayoutId xmlns:r="http://schemas.openxmlformats.org/officeDocument/2006/relationships" id="2147483656" r:id="Rb11f96e2c8934cdb"/>
+    <p:sldLayoutId xmlns:r="http://schemas.openxmlformats.org/officeDocument/2006/relationships" id="2147483657" r:id="R31a320022e464a38"/>
+    <p:sldLayoutId xmlns:r="http://schemas.openxmlformats.org/officeDocument/2006/relationships" id="2147483658" r:id="R3f9cc9adbd2b4945"/>
+    <p:sldLayoutId xmlns:r="http://schemas.openxmlformats.org/officeDocument/2006/relationships" id="2147483659" r:id="R1b61902729124ea5"/>
   </p:sldLayoutIdLst>
   <p:hf hdr="0" ftr="0" dt="0"/>
   <p:txStyles>
